--- a/presentation/Drishti-AI_SIH2026_Presentation.pptx
+++ b/presentation/Drishti-AI_SIH2026_Presentation.pptx
@@ -19,6 +19,7 @@
     <p:sldId id="267" r:id="rId19"/>
     <p:sldId id="268" r:id="rId20"/>
     <p:sldId id="269" r:id="rId21"/>
+    <p:sldId id="270" r:id="rId22"/>
   </p:sldIdLst>
   <p:sldSz cx="12191695" cy="6858000" type="screen4x3"/>
   <p:notesSz cx="6858000" cy="9144000"/>
@@ -655,7 +656,7 @@
           <a:lstStyle/>
           <a:p>
             <a:r>
-              <a:t>Akshay/Adithya. 99.1% is the headline. Explain it as ‘we do not upload healthy eyes and ungradable pixels’.</a:t>
+              <a:t>Lead with the 0.21 sensitivity before a judge finds it. Say: the model is a research baseline (APTOS); everything we built around it — domain gate, quality gate, uncertainty gate, mandatory human review — exists because of exactly this weakness. Every number reproduces with one command: evaluate_labeled_dataset.py.</a:t>
             </a:r>
           </a:p>
         </p:txBody>
@@ -725,7 +726,7 @@
           <a:lstStyle/>
           <a:p>
             <a:r>
-              <a:t>Sinduri/Megha/Bezaleel. Mention bilingual audio for blur. Mention ABDM so it is a national-systems pitch, not a model pitch.</a:t>
+              <a:t>Akshay/Adithya. 99.1% is the headline. Explain it as ‘we do not upload healthy eyes and ungradable pixels’.</a:t>
             </a:r>
           </a:p>
         </p:txBody>
@@ -795,7 +796,7 @@
           <a:lstStyle/>
           <a:p>
             <a:r>
-              <a:t>Introduce in 20 seconds. Do not read bios. Point to live demo owners: Bezaleel (flow), Madhu (clinical), Akshay (model).</a:t>
+              <a:t>Sinduri/Megha/Bezaleel. Mention bilingual audio for blur. Mention ABDM so it is a national-systems pitch, not a model pitch.</a:t>
             </a:r>
           </a:p>
         </p:txBody>
@@ -821,6 +822,76 @@
 </file>
 
 <file path=ppt/notesSlides/notesSlide14.xml><?xml version="1.0" encoding="utf-8"?>
+<p:notes xmlns:a="http://schemas.openxmlformats.org/drawingml/2006/main" xmlns:p="http://schemas.openxmlformats.org/presentationml/2006/main" xmlns:r="http://schemas.openxmlformats.org/officeDocument/2006/relationships">
+  <p:cSld>
+    <p:spTree>
+      <p:nvGrpSpPr>
+        <p:cNvPr id="1" name=""/>
+        <p:cNvGrpSpPr/>
+        <p:nvPr/>
+      </p:nvGrpSpPr>
+      <p:grpSpPr>
+        <a:xfrm>
+          <a:off x="0" y="0"/>
+          <a:ext cx="0" cy="0"/>
+          <a:chOff x="0" y="0"/>
+          <a:chExt cx="0" cy="0"/>
+        </a:xfrm>
+      </p:grpSpPr>
+      <p:sp>
+        <p:nvSpPr>
+          <p:cNvPr id="2" name="Slide Image Placeholder 1"/>
+          <p:cNvSpPr>
+            <a:spLocks noGrp="1"/>
+          </p:cNvSpPr>
+          <p:nvPr>
+            <p:ph type="sldImg" idx="2"/>
+          </p:nvPr>
+        </p:nvSpPr>
+        <p:spPr/>
+      </p:sp>
+      <p:sp>
+        <p:nvSpPr>
+          <p:cNvPr id="3" name="Notes Placeholder 2"/>
+          <p:cNvSpPr>
+            <a:spLocks noGrp="1"/>
+          </p:cNvSpPr>
+          <p:nvPr>
+            <p:ph type="body" idx="3" sz="quarter"/>
+          </p:nvPr>
+        </p:nvSpPr>
+        <p:spPr/>
+        <p:txBody>
+          <a:bodyPr/>
+          <a:lstStyle/>
+          <a:p>
+            <a:r>
+              <a:t>Introduce in 20 seconds. Do not read bios. Point to live demo owners: Bezaleel (flow), Madhu (clinical), Akshay (model).</a:t>
+            </a:r>
+          </a:p>
+        </p:txBody>
+      </p:sp>
+      <p:sp>
+        <p:nvSpPr>
+          <p:cNvPr id="4" name="Slide Number Placeholder 3"/>
+          <p:cNvSpPr>
+            <a:spLocks noGrp="1"/>
+          </p:cNvSpPr>
+          <p:nvPr>
+            <p:ph type="sldNum" idx="5" sz="quarter"/>
+          </p:nvPr>
+        </p:nvSpPr>
+        <p:spPr/>
+      </p:sp>
+    </p:spTree>
+  </p:cSld>
+  <p:clrMapOvr>
+    <a:masterClrMapping/>
+  </p:clrMapOvr>
+</p:notes>
+</file>
+
+<file path=ppt/notesSlides/notesSlide15.xml><?xml version="1.0" encoding="utf-8"?>
 <p:notes xmlns:a="http://schemas.openxmlformats.org/drawingml/2006/main" xmlns:p="http://schemas.openxmlformats.org/presentationml/2006/main" xmlns:r="http://schemas.openxmlformats.org/officeDocument/2006/relationships">
   <p:cSld>
     <p:spTree>
@@ -7240,7 +7311,7 @@
                 </a:solidFill>
                 <a:latin typeface="Calibri"/>
               </a:rPr>
-              <a:t>10  /  14</a:t>
+              <a:t>10  /  15</a:t>
             </a:r>
           </a:p>
         </p:txBody>
@@ -7397,7 +7468,7 @@
                 </a:solidFill>
                 <a:latin typeface="Calibri"/>
               </a:rPr>
-              <a:t>10  —  DISTRICT-SCALE TELEMEDICINE  (MATHWORKS REQ 5)</a:t>
+              <a:t>10  —  EXTERNAL VALIDATION  ·  2,810 REAL LABELED IMAGES</a:t>
             </a:r>
           </a:p>
         </p:txBody>
@@ -7440,7 +7511,7 @@
                 </a:solidFill>
                 <a:latin typeface="Calibri"/>
               </a:rPr>
-              <a:t>Filter at the edge. Uplink only what a specialist must see.</a:t>
+              <a:t>Measured on third-party labeled screening data — nothing copied from a model card.</a:t>
             </a:r>
           </a:p>
         </p:txBody>
@@ -7483,7 +7554,7 @@
                 </a:solidFill>
                 <a:latin typeface="Calibri"/>
               </a:rPr>
-              <a:t>MATLAB / Simulink discrete-event queue  ·  100,000 patients / year  ·  20 PHCs + 5 vans  ·  1 district hospital</a:t>
+              <a:t>docs/EVALUATION_RESULTS.md  ·  results/labeled_evaluation.json  ·  python evaluate_labeled_dataset.py</a:t>
             </a:r>
           </a:p>
         </p:txBody>
@@ -7496,8 +7567,8 @@
         </p:nvSpPr>
         <p:spPr>
           <a:xfrm>
-            <a:off x="365760" y="1371600"/>
-            <a:ext cx="3703320" cy="2148840"/>
+            <a:off x="365760" y="1353312"/>
+            <a:ext cx="2788920" cy="2103120"/>
           </a:xfrm>
           <a:prstGeom prst="roundRect">
             <a:avLst>
@@ -7542,37 +7613,37 @@
         </p:nvSpPr>
         <p:spPr>
           <a:xfrm>
-            <a:off x="566928" y="1554480"/>
-            <a:ext cx="3337560" cy="640080"/>
-          </a:xfrm>
-          <a:prstGeom prst="rect">
-            <a:avLst/>
-          </a:prstGeom>
-          <a:noFill/>
-        </p:spPr>
-        <p:txBody>
-          <a:bodyPr wrap="square" anchor="t"/>
-          <a:lstStyle/>
-          <a:p>
-            <a:pPr algn="l">
-              <a:lnSpc>
-                <a:spcPct val="105000"/>
-              </a:lnSpc>
-              <a:spcBef>
-                <a:spcPts val="0"/>
-              </a:spcBef>
-              <a:spcAft>
-                <a:spcPts val="0"/>
-              </a:spcAft>
-            </a:pPr>
-            <a:r>
-              <a:rPr sz="3200" b="1" i="0">
+            <a:off x="530352" y="1499616"/>
+            <a:ext cx="2468880" cy="566928"/>
+          </a:xfrm>
+          <a:prstGeom prst="rect">
+            <a:avLst/>
+          </a:prstGeom>
+          <a:noFill/>
+        </p:spPr>
+        <p:txBody>
+          <a:bodyPr wrap="square" anchor="t"/>
+          <a:lstStyle/>
+          <a:p>
+            <a:pPr algn="l">
+              <a:lnSpc>
+                <a:spcPct val="105000"/>
+              </a:lnSpc>
+              <a:spcBef>
+                <a:spcPts val="0"/>
+              </a:spcBef>
+              <a:spcAft>
+                <a:spcPts val="0"/>
+              </a:spcAft>
+            </a:pPr>
+            <a:r>
+              <a:rPr sz="3000" b="1" i="0">
                 <a:solidFill>
                   <a:srgbClr val="0D9488"/>
                 </a:solidFill>
                 <a:latin typeface="Calibri"/>
               </a:rPr>
-              <a:t>99.1%</a:t>
+              <a:t>71.5%</a:t>
             </a:r>
           </a:p>
         </p:txBody>
@@ -7585,37 +7656,37 @@
         </p:nvSpPr>
         <p:spPr>
           <a:xfrm>
-            <a:off x="566928" y="2212848"/>
-            <a:ext cx="3337560" cy="329184"/>
-          </a:xfrm>
-          <a:prstGeom prst="rect">
-            <a:avLst/>
-          </a:prstGeom>
-          <a:noFill/>
-        </p:spPr>
-        <p:txBody>
-          <a:bodyPr wrap="square" anchor="t"/>
-          <a:lstStyle/>
-          <a:p>
-            <a:pPr algn="l">
-              <a:lnSpc>
-                <a:spcPct val="105000"/>
-              </a:lnSpc>
-              <a:spcBef>
-                <a:spcPts val="0"/>
-              </a:spcBef>
-              <a:spcAft>
-                <a:spcPts val="0"/>
-              </a:spcAft>
-            </a:pPr>
-            <a:r>
-              <a:rPr sz="1200" b="1" i="0">
+            <a:off x="530352" y="2103120"/>
+            <a:ext cx="2468880" cy="310896"/>
+          </a:xfrm>
+          <a:prstGeom prst="rect">
+            <a:avLst/>
+          </a:prstGeom>
+          <a:noFill/>
+        </p:spPr>
+        <p:txBody>
+          <a:bodyPr wrap="square" anchor="t"/>
+          <a:lstStyle/>
+          <a:p>
+            <a:pPr algn="l">
+              <a:lnSpc>
+                <a:spcPct val="105000"/>
+              </a:lnSpc>
+              <a:spcBef>
+                <a:spcPts val="0"/>
+              </a:spcBef>
+              <a:spcAft>
+                <a:spcPts val="0"/>
+              </a:spcAft>
+            </a:pPr>
+            <a:r>
+              <a:rPr sz="1100" b="1" i="0">
                 <a:solidFill>
                   <a:srgbClr val="FFFFFF"/>
                 </a:solidFill>
                 <a:latin typeface="Calibri"/>
               </a:rPr>
-              <a:t>TELEMETRY CUT</a:t>
+              <a:t>TOP-1 ACCURACY</a:t>
             </a:r>
           </a:p>
         </p:txBody>
@@ -7628,37 +7699,37 @@
         </p:nvSpPr>
         <p:spPr>
           <a:xfrm>
-            <a:off x="566928" y="2578608"/>
-            <a:ext cx="3337560" cy="685800"/>
-          </a:xfrm>
-          <a:prstGeom prst="rect">
-            <a:avLst/>
-          </a:prstGeom>
-          <a:noFill/>
-        </p:spPr>
-        <p:txBody>
-          <a:bodyPr wrap="square" anchor="t"/>
-          <a:lstStyle/>
-          <a:p>
-            <a:pPr algn="l">
-              <a:lnSpc>
-                <a:spcPct val="105000"/>
-              </a:lnSpc>
-              <a:spcBef>
-                <a:spcPts val="0"/>
-              </a:spcBef>
-              <a:spcAft>
-                <a:spcPts val="0"/>
-              </a:spcAft>
-            </a:pPr>
-            <a:r>
-              <a:rPr sz="1300" b="0" i="0">
+            <a:off x="530352" y="2450592"/>
+            <a:ext cx="2468880" cy="914400"/>
+          </a:xfrm>
+          <a:prstGeom prst="rect">
+            <a:avLst/>
+          </a:prstGeom>
+          <a:noFill/>
+        </p:spPr>
+        <p:txBody>
+          <a:bodyPr wrap="square" anchor="t"/>
+          <a:lstStyle/>
+          <a:p>
+            <a:pPr algn="l">
+              <a:lnSpc>
+                <a:spcPct val="105000"/>
+              </a:lnSpc>
+              <a:spcBef>
+                <a:spcPts val="0"/>
+              </a:spcBef>
+              <a:spcAft>
+                <a:spcPts val="0"/>
+              </a:spcAft>
+            </a:pPr>
+            <a:r>
+              <a:rPr sz="1200" b="0" i="0">
                 <a:solidFill>
                   <a:srgbClr val="CBD5E1"/>
                 </a:solidFill>
                 <a:latin typeface="Calibri"/>
               </a:rPr>
-              <a:t>439.9 GB raw fundus  →  3.8 GB flagged cases + metadata</a:t>
+              <a:t>Matches the model card's own 72% APTOS holdout — integration loses nothing.</a:t>
             </a:r>
           </a:p>
         </p:txBody>
@@ -7671,8 +7742,8 @@
         </p:nvSpPr>
         <p:spPr>
           <a:xfrm>
-            <a:off x="4251960" y="1371600"/>
-            <a:ext cx="3703320" cy="2148840"/>
+            <a:off x="3291840" y="1353312"/>
+            <a:ext cx="2788920" cy="2103120"/>
           </a:xfrm>
           <a:prstGeom prst="roundRect">
             <a:avLst>
@@ -7717,37 +7788,37 @@
         </p:nvSpPr>
         <p:spPr>
           <a:xfrm>
-            <a:off x="4453128" y="1554480"/>
-            <a:ext cx="3337560" cy="640080"/>
-          </a:xfrm>
-          <a:prstGeom prst="rect">
-            <a:avLst/>
-          </a:prstGeom>
-          <a:noFill/>
-        </p:spPr>
-        <p:txBody>
-          <a:bodyPr wrap="square" anchor="t"/>
-          <a:lstStyle/>
-          <a:p>
-            <a:pPr algn="l">
-              <a:lnSpc>
-                <a:spcPct val="105000"/>
-              </a:lnSpc>
-              <a:spcBef>
-                <a:spcPts val="0"/>
-              </a:spcBef>
-              <a:spcAft>
-                <a:spcPts val="0"/>
-              </a:spcAft>
-            </a:pPr>
-            <a:r>
-              <a:rPr sz="3200" b="1" i="0">
+            <a:off x="3456432" y="1499616"/>
+            <a:ext cx="2468880" cy="566928"/>
+          </a:xfrm>
+          <a:prstGeom prst="rect">
+            <a:avLst/>
+          </a:prstGeom>
+          <a:noFill/>
+        </p:spPr>
+        <p:txBody>
+          <a:bodyPr wrap="square" anchor="t"/>
+          <a:lstStyle/>
+          <a:p>
+            <a:pPr algn="l">
+              <a:lnSpc>
+                <a:spcPct val="105000"/>
+              </a:lnSpc>
+              <a:spcBef>
+                <a:spcPts val="0"/>
+              </a:spcBef>
+              <a:spcAft>
+                <a:spcPts val="0"/>
+              </a:spcAft>
+            </a:pPr>
+            <a:r>
+              <a:rPr sz="3000" b="1" i="0">
                 <a:solidFill>
                   <a:srgbClr val="0D9488"/>
                 </a:solidFill>
                 <a:latin typeface="Calibri"/>
               </a:rPr>
-              <a:t>~4 → ~1</a:t>
+              <a:t>0.21</a:t>
             </a:r>
           </a:p>
         </p:txBody>
@@ -7760,37 +7831,37 @@
         </p:nvSpPr>
         <p:spPr>
           <a:xfrm>
-            <a:off x="4453128" y="2212848"/>
-            <a:ext cx="3337560" cy="329184"/>
-          </a:xfrm>
-          <a:prstGeom prst="rect">
-            <a:avLst/>
-          </a:prstGeom>
-          <a:noFill/>
-        </p:spPr>
-        <p:txBody>
-          <a:bodyPr wrap="square" anchor="t"/>
-          <a:lstStyle/>
-          <a:p>
-            <a:pPr algn="l">
-              <a:lnSpc>
-                <a:spcPct val="105000"/>
-              </a:lnSpc>
-              <a:spcBef>
-                <a:spcPts val="0"/>
-              </a:spcBef>
-              <a:spcAft>
-                <a:spcPts val="0"/>
-              </a:spcAft>
-            </a:pPr>
-            <a:r>
-              <a:rPr sz="1200" b="1" i="0">
+            <a:off x="3456432" y="2103120"/>
+            <a:ext cx="2468880" cy="310896"/>
+          </a:xfrm>
+          <a:prstGeom prst="rect">
+            <a:avLst/>
+          </a:prstGeom>
+          <a:noFill/>
+        </p:spPr>
+        <p:txBody>
+          <a:bodyPr wrap="square" anchor="t"/>
+          <a:lstStyle/>
+          <a:p>
+            <a:pPr algn="l">
+              <a:lnSpc>
+                <a:spcPct val="105000"/>
+              </a:lnSpc>
+              <a:spcBef>
+                <a:spcPts val="0"/>
+              </a:spcBef>
+              <a:spcAft>
+                <a:spcPts val="0"/>
+              </a:spcAft>
+            </a:pPr>
+            <a:r>
+              <a:rPr sz="1100" b="1" i="0">
                 <a:solidFill>
                   <a:srgbClr val="FFFFFF"/>
                 </a:solidFill>
                 <a:latin typeface="Calibri"/>
               </a:rPr>
-              <a:t>TELE-REVIEWERS / 100K</a:t>
+              <a:t>REFERABLE-DR SENSITIVITY</a:t>
             </a:r>
           </a:p>
         </p:txBody>
@@ -7803,37 +7874,37 @@
         </p:nvSpPr>
         <p:spPr>
           <a:xfrm>
-            <a:off x="4453128" y="2578608"/>
-            <a:ext cx="3337560" cy="685800"/>
-          </a:xfrm>
-          <a:prstGeom prst="rect">
-            <a:avLst/>
-          </a:prstGeom>
-          <a:noFill/>
-        </p:spPr>
-        <p:txBody>
-          <a:bodyPr wrap="square" anchor="t"/>
-          <a:lstStyle/>
-          <a:p>
-            <a:pPr algn="l">
-              <a:lnSpc>
-                <a:spcPct val="105000"/>
-              </a:lnSpc>
-              <a:spcBef>
-                <a:spcPts val="0"/>
-              </a:spcBef>
-              <a:spcAft>
-                <a:spcPts val="0"/>
-              </a:spcAft>
-            </a:pPr>
-            <a:r>
-              <a:rPr sz="1300" b="0" i="0">
+            <a:off x="3456432" y="2450592"/>
+            <a:ext cx="2468880" cy="914400"/>
+          </a:xfrm>
+          <a:prstGeom prst="rect">
+            <a:avLst/>
+          </a:prstGeom>
+          <a:noFill/>
+        </p:spPr>
+        <p:txBody>
+          <a:bodyPr wrap="square" anchor="t"/>
+          <a:lstStyle/>
+          <a:p>
+            <a:pPr algn="l">
+              <a:lnSpc>
+                <a:spcPct val="105000"/>
+              </a:lnSpc>
+              <a:spcBef>
+                <a:spcPts val="0"/>
+              </a:spcBef>
+              <a:spcAft>
+                <a:spcPts val="0"/>
+              </a:spcAft>
+            </a:pPr>
+            <a:r>
+              <a:rPr sz="1200" b="0" i="0">
                 <a:solidFill>
                   <a:srgbClr val="CBD5E1"/>
                 </a:solidFill>
                 <a:latin typeface="Calibri"/>
               </a:rPr>
-              <a:t>Specialist bottleneck broken without hiding disease</a:t>
+              <a:t>Minority recall collapses under domain shift — human review is mandatory, not optional.</a:t>
             </a:r>
           </a:p>
         </p:txBody>
@@ -7846,8 +7917,8 @@
         </p:nvSpPr>
         <p:spPr>
           <a:xfrm>
-            <a:off x="8138160" y="1371600"/>
-            <a:ext cx="3703320" cy="2148840"/>
+            <a:off x="6217920" y="1353312"/>
+            <a:ext cx="2788920" cy="2103120"/>
           </a:xfrm>
           <a:prstGeom prst="roundRect">
             <a:avLst>
@@ -7892,37 +7963,37 @@
         </p:nvSpPr>
         <p:spPr>
           <a:xfrm>
-            <a:off x="8339328" y="1554480"/>
-            <a:ext cx="3337560" cy="640080"/>
-          </a:xfrm>
-          <a:prstGeom prst="rect">
-            <a:avLst/>
-          </a:prstGeom>
-          <a:noFill/>
-        </p:spPr>
-        <p:txBody>
-          <a:bodyPr wrap="square" anchor="t"/>
-          <a:lstStyle/>
-          <a:p>
-            <a:pPr algn="l">
-              <a:lnSpc>
-                <a:spcPct val="105000"/>
-              </a:lnSpc>
-              <a:spcBef>
-                <a:spcPts val="0"/>
-              </a:spcBef>
-              <a:spcAft>
-                <a:spcPts val="0"/>
-              </a:spcAft>
-            </a:pPr>
-            <a:r>
-              <a:rPr sz="3200" b="1" i="0">
+            <a:off x="6382512" y="1499616"/>
+            <a:ext cx="2468880" cy="566928"/>
+          </a:xfrm>
+          <a:prstGeom prst="rect">
+            <a:avLst/>
+          </a:prstGeom>
+          <a:noFill/>
+        </p:spPr>
+        <p:txBody>
+          <a:bodyPr wrap="square" anchor="t"/>
+          <a:lstStyle/>
+          <a:p>
+            <a:pPr algn="l">
+              <a:lnSpc>
+                <a:spcPct val="105000"/>
+              </a:lnSpc>
+              <a:spcBef>
+                <a:spcPts val="0"/>
+              </a:spcBef>
+              <a:spcAft>
+                <a:spcPts val="0"/>
+              </a:spcAft>
+            </a:pPr>
+            <a:r>
+              <a:rPr sz="3000" b="1" i="0">
                 <a:solidFill>
                   <a:srgbClr val="0D9488"/>
                 </a:solidFill>
                 <a:latin typeface="Calibri"/>
               </a:rPr>
-              <a:t>~1.2 s</a:t>
+              <a:t>6.9%</a:t>
             </a:r>
           </a:p>
         </p:txBody>
@@ -7935,37 +8006,37 @@
         </p:nvSpPr>
         <p:spPr>
           <a:xfrm>
-            <a:off x="8339328" y="2212848"/>
-            <a:ext cx="3337560" cy="329184"/>
-          </a:xfrm>
-          <a:prstGeom prst="rect">
-            <a:avLst/>
-          </a:prstGeom>
-          <a:noFill/>
-        </p:spPr>
-        <p:txBody>
-          <a:bodyPr wrap="square" anchor="t"/>
-          <a:lstStyle/>
-          <a:p>
-            <a:pPr algn="l">
-              <a:lnSpc>
-                <a:spcPct val="105000"/>
-              </a:lnSpc>
-              <a:spcBef>
-                <a:spcPts val="0"/>
-              </a:spcBef>
-              <a:spcAft>
-                <a:spcPts val="0"/>
-              </a:spcAft>
-            </a:pPr>
-            <a:r>
-              <a:rPr sz="1200" b="1" i="0">
+            <a:off x="6382512" y="2103120"/>
+            <a:ext cx="2468880" cy="310896"/>
+          </a:xfrm>
+          <a:prstGeom prst="rect">
+            <a:avLst/>
+          </a:prstGeom>
+          <a:noFill/>
+        </p:spPr>
+        <p:txBody>
+          <a:bodyPr wrap="square" anchor="t"/>
+          <a:lstStyle/>
+          <a:p>
+            <a:pPr algn="l">
+              <a:lnSpc>
+                <a:spcPct val="105000"/>
+              </a:lnSpc>
+              <a:spcBef>
+                <a:spcPts val="0"/>
+              </a:spcBef>
+              <a:spcAft>
+                <a:spcPts val="0"/>
+              </a:spcAft>
+            </a:pPr>
+            <a:r>
+              <a:rPr sz="1100" b="1" i="0">
                 <a:solidFill>
                   <a:srgbClr val="FFFFFF"/>
                 </a:solidFill>
                 <a:latin typeface="Calibri"/>
               </a:rPr>
-              <a:t>ON-SITE TURNAROUND</a:t>
+              <a:t>DOMAIN-GATE FALSE REJECTS</a:t>
             </a:r>
           </a:p>
         </p:txBody>
@@ -7978,37 +8049,37 @@
         </p:nvSpPr>
         <p:spPr>
           <a:xfrm>
-            <a:off x="8339328" y="2578608"/>
-            <a:ext cx="3337560" cy="685800"/>
-          </a:xfrm>
-          <a:prstGeom prst="rect">
-            <a:avLst/>
-          </a:prstGeom>
-          <a:noFill/>
-        </p:spPr>
-        <p:txBody>
-          <a:bodyPr wrap="square" anchor="t"/>
-          <a:lstStyle/>
-          <a:p>
-            <a:pPr algn="l">
-              <a:lnSpc>
-                <a:spcPct val="105000"/>
-              </a:lnSpc>
-              <a:spcBef>
-                <a:spcPts val="0"/>
-              </a:spcBef>
-              <a:spcAft>
-                <a:spcPts val="0"/>
-              </a:spcAft>
-            </a:pPr>
-            <a:r>
-              <a:rPr sz="1300" b="0" i="0">
+            <a:off x="6382512" y="2450592"/>
+            <a:ext cx="2468880" cy="914400"/>
+          </a:xfrm>
+          <a:prstGeom prst="rect">
+            <a:avLst/>
+          </a:prstGeom>
+          <a:noFill/>
+        </p:spPr>
+        <p:txBody>
+          <a:bodyPr wrap="square" anchor="t"/>
+          <a:lstStyle/>
+          <a:p>
+            <a:pPr algn="l">
+              <a:lnSpc>
+                <a:spcPct val="105000"/>
+              </a:lnSpc>
+              <a:spcBef>
+                <a:spcPts val="0"/>
+              </a:spcBef>
+              <a:spcAft>
+                <a:spcPts val="0"/>
+              </a:spcAft>
+            </a:pPr>
+            <a:r>
+              <a:rPr sz="1200" b="0" i="0">
                 <a:solidFill>
                   <a:srgbClr val="CBD5E1"/>
                 </a:solidFill>
                 <a:latin typeface="Calibri"/>
               </a:rPr>
-              <a:t>vs ~1.9 min cloud-only round trip per patient</a:t>
+              <a:t>Down from 42% after calibration on real data; over-refuse, never invent.</a:t>
             </a:r>
           </a:p>
         </p:txBody>
@@ -8021,12 +8092,187 @@
         </p:nvSpPr>
         <p:spPr>
           <a:xfrm>
-            <a:off x="365760" y="3730752"/>
-            <a:ext cx="11475720" cy="2670048"/>
+            <a:off x="9144000" y="1353312"/>
+            <a:ext cx="2788920" cy="2103120"/>
           </a:xfrm>
           <a:prstGeom prst="roundRect">
             <a:avLst>
               <a:gd name="adj" fmla="val 8000"/>
+            </a:avLst>
+          </a:prstGeom>
+          <a:solidFill>
+            <a:srgbClr val="0A2540"/>
+          </a:solidFill>
+          <a:ln>
+            <a:noFill/>
+          </a:ln>
+          <a:effectLst/>
+        </p:spPr>
+        <p:style>
+          <a:lnRef idx="1">
+            <a:schemeClr val="accent1"/>
+          </a:lnRef>
+          <a:fillRef idx="3">
+            <a:schemeClr val="accent1"/>
+          </a:fillRef>
+          <a:effectRef idx="2">
+            <a:schemeClr val="accent1"/>
+          </a:effectRef>
+          <a:fontRef idx="minor">
+            <a:schemeClr val="lt1"/>
+          </a:fontRef>
+        </p:style>
+        <p:txBody>
+          <a:bodyPr rtlCol="0" anchor="ctr"/>
+          <a:lstStyle/>
+          <a:p>
+            <a:pPr algn="ctr"/>
+          </a:p>
+        </p:txBody>
+      </p:sp>
+      <p:sp>
+        <p:nvSpPr>
+          <p:cNvPr id="20" name="TextBox 19"/>
+          <p:cNvSpPr txBox="1"/>
+          <p:nvPr/>
+        </p:nvSpPr>
+        <p:spPr>
+          <a:xfrm>
+            <a:off x="9308592" y="1499616"/>
+            <a:ext cx="2468880" cy="566928"/>
+          </a:xfrm>
+          <a:prstGeom prst="rect">
+            <a:avLst/>
+          </a:prstGeom>
+          <a:noFill/>
+        </p:spPr>
+        <p:txBody>
+          <a:bodyPr wrap="square" anchor="t"/>
+          <a:lstStyle/>
+          <a:p>
+            <a:pPr algn="l">
+              <a:lnSpc>
+                <a:spcPct val="105000"/>
+              </a:lnSpc>
+              <a:spcBef>
+                <a:spcPts val="0"/>
+              </a:spcBef>
+              <a:spcAft>
+                <a:spcPts val="0"/>
+              </a:spcAft>
+            </a:pPr>
+            <a:r>
+              <a:rPr sz="3000" b="1" i="0">
+                <a:solidFill>
+                  <a:srgbClr val="0D9488"/>
+                </a:solidFill>
+                <a:latin typeface="Calibri"/>
+              </a:rPr>
+              <a:t>14 / 14</a:t>
+            </a:r>
+          </a:p>
+        </p:txBody>
+      </p:sp>
+      <p:sp>
+        <p:nvSpPr>
+          <p:cNvPr id="21" name="TextBox 20"/>
+          <p:cNvSpPr txBox="1"/>
+          <p:nvPr/>
+        </p:nvSpPr>
+        <p:spPr>
+          <a:xfrm>
+            <a:off x="9308592" y="2103120"/>
+            <a:ext cx="2468880" cy="310896"/>
+          </a:xfrm>
+          <a:prstGeom prst="rect">
+            <a:avLst/>
+          </a:prstGeom>
+          <a:noFill/>
+        </p:spPr>
+        <p:txBody>
+          <a:bodyPr wrap="square" anchor="t"/>
+          <a:lstStyle/>
+          <a:p>
+            <a:pPr algn="l">
+              <a:lnSpc>
+                <a:spcPct val="105000"/>
+              </a:lnSpc>
+              <a:spcBef>
+                <a:spcPts val="0"/>
+              </a:spcBef>
+              <a:spcAft>
+                <a:spcPts val="0"/>
+              </a:spcAft>
+            </a:pPr>
+            <a:r>
+              <a:rPr sz="1100" b="1" i="0">
+                <a:solidFill>
+                  <a:srgbClr val="FFFFFF"/>
+                </a:solidFill>
+                <a:latin typeface="Calibri"/>
+              </a:rPr>
+              <a:t>ADVERSARIAL INPUTS BLOCKED</a:t>
+            </a:r>
+          </a:p>
+        </p:txBody>
+      </p:sp>
+      <p:sp>
+        <p:nvSpPr>
+          <p:cNvPr id="22" name="TextBox 21"/>
+          <p:cNvSpPr txBox="1"/>
+          <p:nvPr/>
+        </p:nvSpPr>
+        <p:spPr>
+          <a:xfrm>
+            <a:off x="9308592" y="2450592"/>
+            <a:ext cx="2468880" cy="914400"/>
+          </a:xfrm>
+          <a:prstGeom prst="rect">
+            <a:avLst/>
+          </a:prstGeom>
+          <a:noFill/>
+        </p:spPr>
+        <p:txBody>
+          <a:bodyPr wrap="square" anchor="t"/>
+          <a:lstStyle/>
+          <a:p>
+            <a:pPr algn="l">
+              <a:lnSpc>
+                <a:spcPct val="105000"/>
+              </a:lnSpc>
+              <a:spcBef>
+                <a:spcPts val="0"/>
+              </a:spcBef>
+              <a:spcAft>
+                <a:spcPts val="0"/>
+              </a:spcAft>
+            </a:pPr>
+            <a:r>
+              <a:rPr sz="1200" b="0" i="0">
+                <a:solidFill>
+                  <a:srgbClr val="CBD5E1"/>
+                </a:solidFill>
+                <a:latin typeface="Calibri"/>
+              </a:rPr>
+              <a:t>Faces, documents, screenshots rejected — red-team sweep runs in CI (76 subtests).</a:t>
+            </a:r>
+          </a:p>
+        </p:txBody>
+      </p:sp>
+      <p:sp>
+        <p:nvSpPr>
+          <p:cNvPr id="23" name="Rounded Rectangle 22"/>
+          <p:cNvSpPr/>
+          <p:nvPr/>
+        </p:nvSpPr>
+        <p:spPr>
+          <a:xfrm>
+            <a:off x="365760" y="3639312"/>
+            <a:ext cx="11475720" cy="694944"/>
+          </a:xfrm>
+          <a:prstGeom prst="roundRect">
+            <a:avLst>
+              <a:gd name="adj" fmla="val 6000"/>
             </a:avLst>
           </a:prstGeom>
           <a:solidFill>
@@ -8063,57 +8309,14 @@
       </p:sp>
       <p:sp>
         <p:nvSpPr>
-          <p:cNvPr id="20" name="TextBox 19"/>
-          <p:cNvSpPr txBox="1"/>
-          <p:nvPr/>
-        </p:nvSpPr>
-        <p:spPr>
-          <a:xfrm>
-            <a:off x="594360" y="3877056"/>
-            <a:ext cx="11064240" cy="329184"/>
-          </a:xfrm>
-          <a:prstGeom prst="rect">
-            <a:avLst/>
-          </a:prstGeom>
-          <a:noFill/>
-        </p:spPr>
-        <p:txBody>
-          <a:bodyPr wrap="square" anchor="t"/>
-          <a:lstStyle/>
-          <a:p>
-            <a:pPr algn="l">
-              <a:lnSpc>
-                <a:spcPct val="105000"/>
-              </a:lnSpc>
-              <a:spcBef>
-                <a:spcPts val="0"/>
-              </a:spcBef>
-              <a:spcAft>
-                <a:spcPts val="0"/>
-              </a:spcAft>
-            </a:pPr>
-            <a:r>
-              <a:rPr sz="1300" b="1" i="0">
-                <a:solidFill>
-                  <a:srgbClr val="0D9488"/>
-                </a:solidFill>
-                <a:latin typeface="Calibri"/>
-              </a:rPr>
-              <a:t>WHAT THE SIMULINK MODEL ACTUALLY SIMULATES</a:t>
-            </a:r>
-          </a:p>
-        </p:txBody>
-      </p:sp>
-      <p:sp>
-        <p:nvSpPr>
-          <p:cNvPr id="21" name="TextBox 20"/>
-          <p:cNvSpPr txBox="1"/>
-          <p:nvPr/>
-        </p:nvSpPr>
-        <p:spPr>
-          <a:xfrm>
-            <a:off x="594360" y="4315968"/>
-            <a:ext cx="5394960" cy="256032"/>
+          <p:cNvPr id="24" name="TextBox 23"/>
+          <p:cNvSpPr txBox="1"/>
+          <p:nvPr/>
+        </p:nvSpPr>
+        <p:spPr>
+          <a:xfrm>
+            <a:off x="548640" y="3712463"/>
+            <a:ext cx="5760720" cy="292608"/>
           </a:xfrm>
           <a:prstGeom prst="rect">
             <a:avLst/>
@@ -8142,21 +8345,21 @@
                 </a:solidFill>
                 <a:latin typeface="Calibri"/>
               </a:rPr>
-              <a:t>M/M/c queues</a:t>
-            </a:r>
-          </a:p>
-        </p:txBody>
-      </p:sp>
-      <p:sp>
-        <p:nvSpPr>
-          <p:cNvPr id="22" name="TextBox 21"/>
-          <p:cNvSpPr txBox="1"/>
-          <p:nvPr/>
-        </p:nvSpPr>
-        <p:spPr>
-          <a:xfrm>
-            <a:off x="594360" y="4608576"/>
-            <a:ext cx="5394960" cy="502920"/>
+              <a:t>QWK 0.31  ·  macro-F1 0.26  ·  ECE 0.064</a:t>
+            </a:r>
+          </a:p>
+        </p:txBody>
+      </p:sp>
+      <p:sp>
+        <p:nvSpPr>
+          <p:cNvPr id="25" name="TextBox 24"/>
+          <p:cNvSpPr txBox="1"/>
+          <p:nvPr/>
+        </p:nvSpPr>
+        <p:spPr>
+          <a:xfrm>
+            <a:off x="6446520" y="3712463"/>
+            <a:ext cx="5257800" cy="548640"/>
           </a:xfrm>
           <a:prstGeom prst="rect">
             <a:avLst/>
@@ -8185,21 +8388,69 @@
                 </a:solidFill>
                 <a:latin typeface="Calibri"/>
               </a:rPr>
-              <a:t>Patient arrivals, edge inference, tele-ophthalmology uplink as a discrete-event system — not a static spreadsheet.</a:t>
-            </a:r>
-          </a:p>
-        </p:txBody>
-      </p:sp>
-      <p:sp>
-        <p:nvSpPr>
-          <p:cNvPr id="23" name="TextBox 22"/>
-          <p:cNvSpPr txBox="1"/>
-          <p:nvPr/>
-        </p:nvSpPr>
-        <p:spPr>
-          <a:xfrm>
-            <a:off x="6217920" y="4315968"/>
-            <a:ext cx="5394960" cy="256032"/>
+              <a:t>Accuracy is carried by the majority class; these are the honest numbers and we publish them.</a:t>
+            </a:r>
+          </a:p>
+        </p:txBody>
+      </p:sp>
+      <p:sp>
+        <p:nvSpPr>
+          <p:cNvPr id="26" name="Rounded Rectangle 25"/>
+          <p:cNvSpPr/>
+          <p:nvPr/>
+        </p:nvSpPr>
+        <p:spPr>
+          <a:xfrm>
+            <a:off x="365760" y="4416552"/>
+            <a:ext cx="11475720" cy="694944"/>
+          </a:xfrm>
+          <a:prstGeom prst="roundRect">
+            <a:avLst>
+              <a:gd name="adj" fmla="val 6000"/>
+            </a:avLst>
+          </a:prstGeom>
+          <a:solidFill>
+            <a:srgbClr val="FFFFFF"/>
+          </a:solidFill>
+          <a:ln w="12700">
+            <a:solidFill>
+              <a:srgbClr val="E2E8F0"/>
+            </a:solidFill>
+          </a:ln>
+          <a:effectLst/>
+        </p:spPr>
+        <p:style>
+          <a:lnRef idx="1">
+            <a:schemeClr val="accent1"/>
+          </a:lnRef>
+          <a:fillRef idx="3">
+            <a:schemeClr val="accent1"/>
+          </a:fillRef>
+          <a:effectRef idx="2">
+            <a:schemeClr val="accent1"/>
+          </a:effectRef>
+          <a:fontRef idx="minor">
+            <a:schemeClr val="lt1"/>
+          </a:fontRef>
+        </p:style>
+        <p:txBody>
+          <a:bodyPr rtlCol="0" anchor="ctr"/>
+          <a:lstStyle/>
+          <a:p>
+            <a:pPr algn="ctr"/>
+          </a:p>
+        </p:txBody>
+      </p:sp>
+      <p:sp>
+        <p:nvSpPr>
+          <p:cNvPr id="27" name="TextBox 26"/>
+          <p:cNvSpPr txBox="1"/>
+          <p:nvPr/>
+        </p:nvSpPr>
+        <p:spPr>
+          <a:xfrm>
+            <a:off x="548640" y="4489704"/>
+            <a:ext cx="5760720" cy="292608"/>
           </a:xfrm>
           <a:prstGeom prst="rect">
             <a:avLst/>
@@ -8228,21 +8479,21 @@
                 </a:solidFill>
                 <a:latin typeface="Calibri"/>
               </a:rPr>
-              <a:t>Local processing</a:t>
-            </a:r>
-          </a:p>
-        </p:txBody>
-      </p:sp>
-      <p:sp>
-        <p:nvSpPr>
-          <p:cNvPr id="24" name="TextBox 23"/>
-          <p:cNvSpPr txBox="1"/>
-          <p:nvPr/>
-        </p:nvSpPr>
-        <p:spPr>
-          <a:xfrm>
-            <a:off x="6217920" y="4608576"/>
-            <a:ext cx="5394960" cy="502920"/>
+              <a:t>Model 1 pass rate: 75.7% (was 40.9%, threshold recalibrated)</a:t>
+            </a:r>
+          </a:p>
+        </p:txBody>
+      </p:sp>
+      <p:sp>
+        <p:nvSpPr>
+          <p:cNvPr id="28" name="TextBox 27"/>
+          <p:cNvSpPr txBox="1"/>
+          <p:nvPr/>
+        </p:nvSpPr>
+        <p:spPr>
+          <a:xfrm>
+            <a:off x="6446520" y="4489704"/>
+            <a:ext cx="5257800" cy="548640"/>
           </a:xfrm>
           <a:prstGeom prst="rect">
             <a:avLst/>
@@ -8271,21 +8522,69 @@
                 </a:solidFill>
                 <a:latin typeface="Calibri"/>
               </a:rPr>
-              <a:t>Only referable, low-confidence, high-risk, and recapture-exhausted cases leave the PHC.</a:t>
-            </a:r>
-          </a:p>
-        </p:txBody>
-      </p:sp>
-      <p:sp>
-        <p:nvSpPr>
-          <p:cNvPr id="25" name="TextBox 24"/>
-          <p:cNvSpPr txBox="1"/>
-          <p:nvPr/>
-        </p:nvSpPr>
-        <p:spPr>
-          <a:xfrm>
-            <a:off x="594360" y="5230368"/>
-            <a:ext cx="5394960" cy="256032"/>
+              <a:t>Full 2,810-image run; fails safe (over-refuses) and every failure fixture is still rejected.</a:t>
+            </a:r>
+          </a:p>
+        </p:txBody>
+      </p:sp>
+      <p:sp>
+        <p:nvSpPr>
+          <p:cNvPr id="29" name="Rounded Rectangle 28"/>
+          <p:cNvSpPr/>
+          <p:nvPr/>
+        </p:nvSpPr>
+        <p:spPr>
+          <a:xfrm>
+            <a:off x="365760" y="5193792"/>
+            <a:ext cx="11475720" cy="694944"/>
+          </a:xfrm>
+          <a:prstGeom prst="roundRect">
+            <a:avLst>
+              <a:gd name="adj" fmla="val 6000"/>
+            </a:avLst>
+          </a:prstGeom>
+          <a:solidFill>
+            <a:srgbClr val="FFFFFF"/>
+          </a:solidFill>
+          <a:ln w="12700">
+            <a:solidFill>
+              <a:srgbClr val="E2E8F0"/>
+            </a:solidFill>
+          </a:ln>
+          <a:effectLst/>
+        </p:spPr>
+        <p:style>
+          <a:lnRef idx="1">
+            <a:schemeClr val="accent1"/>
+          </a:lnRef>
+          <a:fillRef idx="3">
+            <a:schemeClr val="accent1"/>
+          </a:fillRef>
+          <a:effectRef idx="2">
+            <a:schemeClr val="accent1"/>
+          </a:effectRef>
+          <a:fontRef idx="minor">
+            <a:schemeClr val="lt1"/>
+          </a:fontRef>
+        </p:style>
+        <p:txBody>
+          <a:bodyPr rtlCol="0" anchor="ctr"/>
+          <a:lstStyle/>
+          <a:p>
+            <a:pPr algn="ctr"/>
+          </a:p>
+        </p:txBody>
+      </p:sp>
+      <p:sp>
+        <p:nvSpPr>
+          <p:cNvPr id="30" name="TextBox 29"/>
+          <p:cNvSpPr txBox="1"/>
+          <p:nvPr/>
+        </p:nvSpPr>
+        <p:spPr>
+          <a:xfrm>
+            <a:off x="548640" y="5266944"/>
+            <a:ext cx="5760720" cy="292608"/>
           </a:xfrm>
           <a:prstGeom prst="rect">
             <a:avLst/>
@@ -8314,21 +8613,21 @@
                 </a:solidFill>
                 <a:latin typeface="Calibri"/>
               </a:rPr>
-              <a:t>Capacity proof</a:t>
-            </a:r>
-          </a:p>
-        </p:txBody>
-      </p:sp>
-      <p:sp>
-        <p:nvSpPr>
-          <p:cNvPr id="26" name="TextBox 25"/>
-          <p:cNvSpPr txBox="1"/>
-          <p:nvPr/>
-        </p:nvSpPr>
-        <p:spPr>
-          <a:xfrm>
-            <a:off x="594360" y="5522976"/>
-            <a:ext cx="5394960" cy="502920"/>
+              <a:t>E2E demo rehearsal: 2/2 runs, 26 assertions green</a:t>
+            </a:r>
+          </a:p>
+        </p:txBody>
+      </p:sp>
+      <p:sp>
+        <p:nvSpPr>
+          <p:cNvPr id="31" name="TextBox 30"/>
+          <p:cNvSpPr txBox="1"/>
+          <p:nvPr/>
+        </p:nvSpPr>
+        <p:spPr>
+          <a:xfrm>
+            <a:off x="6446520" y="5266944"/>
+            <a:ext cx="5257800" cy="548640"/>
           </a:xfrm>
           <a:prstGeom prst="rect">
             <a:avLst/>
@@ -8357,21 +8656,21 @@
                 </a:solidFill>
                 <a:latin typeface="Calibri"/>
               </a:rPr>
-              <a:t>Workload drops from 100,000 raw cases to ~16,100 triage cases/year (~62/day) — feasible for a single tele-reviewer.</a:t>
-            </a:r>
-          </a:p>
-        </p:txBody>
-      </p:sp>
-      <p:sp>
-        <p:nvSpPr>
-          <p:cNvPr id="27" name="TextBox 26"/>
-          <p:cNvSpPr txBox="1"/>
-          <p:nvPr/>
-        </p:nvSpPr>
-        <p:spPr>
-          <a:xfrm>
-            <a:off x="6217920" y="5230368"/>
-            <a:ext cx="5394960" cy="256032"/>
+              <a:t>Boots the real HTTP API: register → risk → quality → analyze → history → adverse input → review queue.</a:t>
+            </a:r>
+          </a:p>
+        </p:txBody>
+      </p:sp>
+      <p:sp>
+        <p:nvSpPr>
+          <p:cNvPr id="32" name="TextBox 31"/>
+          <p:cNvSpPr txBox="1"/>
+          <p:nvPr/>
+        </p:nvSpPr>
+        <p:spPr>
+          <a:xfrm>
+            <a:off x="411480" y="6053328"/>
+            <a:ext cx="11338560" cy="384048"/>
           </a:xfrm>
           <a:prstGeom prst="rect">
             <a:avLst/>
@@ -8396,61 +8695,18 @@
             <a:r>
               <a:rPr sz="1400" b="1" i="0">
                 <a:solidFill>
-                  <a:srgbClr val="0A2540"/>
-                </a:solidFill>
-                <a:latin typeface="Calibri"/>
-              </a:rPr>
-              <a:t>Hostile networks</a:t>
-            </a:r>
-          </a:p>
-        </p:txBody>
-      </p:sp>
-      <p:sp>
-        <p:nvSpPr>
-          <p:cNvPr id="28" name="TextBox 27"/>
-          <p:cNvSpPr txBox="1"/>
-          <p:nvPr/>
-        </p:nvSpPr>
-        <p:spPr>
-          <a:xfrm>
-            <a:off x="6217920" y="5522976"/>
-            <a:ext cx="5394960" cy="502920"/>
-          </a:xfrm>
-          <a:prstGeom prst="rect">
-            <a:avLst/>
-          </a:prstGeom>
-          <a:noFill/>
-        </p:spPr>
-        <p:txBody>
-          <a:bodyPr wrap="square" anchor="t"/>
-          <a:lstStyle/>
-          <a:p>
-            <a:pPr algn="l">
-              <a:lnSpc>
-                <a:spcPct val="105000"/>
-              </a:lnSpc>
-              <a:spcBef>
-                <a:spcPts val="0"/>
-              </a:spcBef>
-              <a:spcAft>
-                <a:spcPts val="0"/>
-              </a:spcAft>
-            </a:pPr>
-            <a:r>
-              <a:rPr sz="1200" b="0" i="0">
-                <a:solidFill>
-                  <a:srgbClr val="475569"/>
-                </a:solidFill>
-                <a:latin typeface="Calibri"/>
-              </a:rPr>
-              <a:t>Lightweight compressed packets remain viable on intermittent 2G/3G. Screening never waits on the WAN.</a:t>
-            </a:r>
-          </a:p>
-        </p:txBody>
-      </p:sp>
-      <p:sp>
-        <p:nvSpPr>
-          <p:cNvPr id="29" name="Rectangle 28"/>
+                  <a:srgbClr val="334155"/>
+                </a:solidFill>
+                <a:latin typeface="Calibri"/>
+              </a:rPr>
+              <a:t>Honest headline: we defend the safety architecture — refuse, defer, escalate — not an accuracy number the model does not have.</a:t>
+            </a:r>
+          </a:p>
+        </p:txBody>
+      </p:sp>
+      <p:sp>
+        <p:nvSpPr>
+          <p:cNvPr id="33" name="Rectangle 32"/>
           <p:cNvSpPr/>
           <p:nvPr/>
         </p:nvSpPr>
@@ -8494,7 +8750,7 @@
       </p:sp>
       <p:sp>
         <p:nvSpPr>
-          <p:cNvPr id="30" name="TextBox 29"/>
+          <p:cNvPr id="34" name="TextBox 33"/>
           <p:cNvSpPr txBox="1"/>
           <p:nvPr/>
         </p:nvSpPr>
@@ -8537,7 +8793,7 @@
       </p:sp>
       <p:sp>
         <p:nvSpPr>
-          <p:cNvPr id="31" name="TextBox 30"/>
+          <p:cNvPr id="35" name="TextBox 34"/>
           <p:cNvSpPr txBox="1"/>
           <p:nvPr/>
         </p:nvSpPr>
@@ -8573,7 +8829,7 @@
                 </a:solidFill>
                 <a:latin typeface="Calibri"/>
               </a:rPr>
-              <a:t>11  /  14</a:t>
+              <a:t>11  /  15</a:t>
             </a:r>
           </a:p>
         </p:txBody>
@@ -8730,7 +8986,7 @@
                 </a:solidFill>
                 <a:latin typeface="Calibri"/>
               </a:rPr>
-              <a:t>11  —  BUILT FOR THE FIELD, NOT THE DEMO BOOTH</a:t>
+              <a:t>11  —  DISTRICT-SCALE TELEMEDICINE  (MATHWORKS REQ 5)</a:t>
             </a:r>
           </a:p>
         </p:txBody>
@@ -8773,7 +9029,7 @@
                 </a:solidFill>
                 <a:latin typeface="Calibri"/>
               </a:rPr>
-              <a:t>Offline. Commodity hardware. Frontline UX. National digital health rails.</a:t>
+              <a:t>Filter at the edge. Uplink only what a specialist must see.</a:t>
             </a:r>
           </a:p>
         </p:txBody>
@@ -8816,7 +9072,7 @@
                 </a:solidFill>
                 <a:latin typeface="Calibri"/>
               </a:rPr>
-              <a:t>The Streamlit UI is how judges interact. The product is everything that works outside a hospital.</a:t>
+              <a:t>MATLAB / Simulink discrete-event queue  ·  100,000 patients / year  ·  20 PHCs + 5 vans  ·  1 district hospital</a:t>
             </a:r>
           </a:p>
         </p:txBody>
@@ -8829,8 +9085,533 @@
         </p:nvSpPr>
         <p:spPr>
           <a:xfrm>
-            <a:off x="365760" y="1353312"/>
-            <a:ext cx="5715000" cy="2304288"/>
+            <a:off x="365760" y="1371600"/>
+            <a:ext cx="3703320" cy="2148840"/>
+          </a:xfrm>
+          <a:prstGeom prst="roundRect">
+            <a:avLst>
+              <a:gd name="adj" fmla="val 8000"/>
+            </a:avLst>
+          </a:prstGeom>
+          <a:solidFill>
+            <a:srgbClr val="0A2540"/>
+          </a:solidFill>
+          <a:ln>
+            <a:noFill/>
+          </a:ln>
+          <a:effectLst/>
+        </p:spPr>
+        <p:style>
+          <a:lnRef idx="1">
+            <a:schemeClr val="accent1"/>
+          </a:lnRef>
+          <a:fillRef idx="3">
+            <a:schemeClr val="accent1"/>
+          </a:fillRef>
+          <a:effectRef idx="2">
+            <a:schemeClr val="accent1"/>
+          </a:effectRef>
+          <a:fontRef idx="minor">
+            <a:schemeClr val="lt1"/>
+          </a:fontRef>
+        </p:style>
+        <p:txBody>
+          <a:bodyPr rtlCol="0" anchor="ctr"/>
+          <a:lstStyle/>
+          <a:p>
+            <a:pPr algn="ctr"/>
+          </a:p>
+        </p:txBody>
+      </p:sp>
+      <p:sp>
+        <p:nvSpPr>
+          <p:cNvPr id="8" name="TextBox 7"/>
+          <p:cNvSpPr txBox="1"/>
+          <p:nvPr/>
+        </p:nvSpPr>
+        <p:spPr>
+          <a:xfrm>
+            <a:off x="566928" y="1554480"/>
+            <a:ext cx="3337560" cy="640080"/>
+          </a:xfrm>
+          <a:prstGeom prst="rect">
+            <a:avLst/>
+          </a:prstGeom>
+          <a:noFill/>
+        </p:spPr>
+        <p:txBody>
+          <a:bodyPr wrap="square" anchor="t"/>
+          <a:lstStyle/>
+          <a:p>
+            <a:pPr algn="l">
+              <a:lnSpc>
+                <a:spcPct val="105000"/>
+              </a:lnSpc>
+              <a:spcBef>
+                <a:spcPts val="0"/>
+              </a:spcBef>
+              <a:spcAft>
+                <a:spcPts val="0"/>
+              </a:spcAft>
+            </a:pPr>
+            <a:r>
+              <a:rPr sz="3200" b="1" i="0">
+                <a:solidFill>
+                  <a:srgbClr val="0D9488"/>
+                </a:solidFill>
+                <a:latin typeface="Calibri"/>
+              </a:rPr>
+              <a:t>99.1%</a:t>
+            </a:r>
+          </a:p>
+        </p:txBody>
+      </p:sp>
+      <p:sp>
+        <p:nvSpPr>
+          <p:cNvPr id="9" name="TextBox 8"/>
+          <p:cNvSpPr txBox="1"/>
+          <p:nvPr/>
+        </p:nvSpPr>
+        <p:spPr>
+          <a:xfrm>
+            <a:off x="566928" y="2212848"/>
+            <a:ext cx="3337560" cy="329184"/>
+          </a:xfrm>
+          <a:prstGeom prst="rect">
+            <a:avLst/>
+          </a:prstGeom>
+          <a:noFill/>
+        </p:spPr>
+        <p:txBody>
+          <a:bodyPr wrap="square" anchor="t"/>
+          <a:lstStyle/>
+          <a:p>
+            <a:pPr algn="l">
+              <a:lnSpc>
+                <a:spcPct val="105000"/>
+              </a:lnSpc>
+              <a:spcBef>
+                <a:spcPts val="0"/>
+              </a:spcBef>
+              <a:spcAft>
+                <a:spcPts val="0"/>
+              </a:spcAft>
+            </a:pPr>
+            <a:r>
+              <a:rPr sz="1200" b="1" i="0">
+                <a:solidFill>
+                  <a:srgbClr val="FFFFFF"/>
+                </a:solidFill>
+                <a:latin typeface="Calibri"/>
+              </a:rPr>
+              <a:t>TELEMETRY CUT</a:t>
+            </a:r>
+          </a:p>
+        </p:txBody>
+      </p:sp>
+      <p:sp>
+        <p:nvSpPr>
+          <p:cNvPr id="10" name="TextBox 9"/>
+          <p:cNvSpPr txBox="1"/>
+          <p:nvPr/>
+        </p:nvSpPr>
+        <p:spPr>
+          <a:xfrm>
+            <a:off x="566928" y="2578608"/>
+            <a:ext cx="3337560" cy="685800"/>
+          </a:xfrm>
+          <a:prstGeom prst="rect">
+            <a:avLst/>
+          </a:prstGeom>
+          <a:noFill/>
+        </p:spPr>
+        <p:txBody>
+          <a:bodyPr wrap="square" anchor="t"/>
+          <a:lstStyle/>
+          <a:p>
+            <a:pPr algn="l">
+              <a:lnSpc>
+                <a:spcPct val="105000"/>
+              </a:lnSpc>
+              <a:spcBef>
+                <a:spcPts val="0"/>
+              </a:spcBef>
+              <a:spcAft>
+                <a:spcPts val="0"/>
+              </a:spcAft>
+            </a:pPr>
+            <a:r>
+              <a:rPr sz="1300" b="0" i="0">
+                <a:solidFill>
+                  <a:srgbClr val="CBD5E1"/>
+                </a:solidFill>
+                <a:latin typeface="Calibri"/>
+              </a:rPr>
+              <a:t>439.9 GB raw fundus  →  3.8 GB flagged cases + metadata</a:t>
+            </a:r>
+          </a:p>
+        </p:txBody>
+      </p:sp>
+      <p:sp>
+        <p:nvSpPr>
+          <p:cNvPr id="11" name="Rounded Rectangle 10"/>
+          <p:cNvSpPr/>
+          <p:nvPr/>
+        </p:nvSpPr>
+        <p:spPr>
+          <a:xfrm>
+            <a:off x="4251960" y="1371600"/>
+            <a:ext cx="3703320" cy="2148840"/>
+          </a:xfrm>
+          <a:prstGeom prst="roundRect">
+            <a:avLst>
+              <a:gd name="adj" fmla="val 8000"/>
+            </a:avLst>
+          </a:prstGeom>
+          <a:solidFill>
+            <a:srgbClr val="0A2540"/>
+          </a:solidFill>
+          <a:ln>
+            <a:noFill/>
+          </a:ln>
+          <a:effectLst/>
+        </p:spPr>
+        <p:style>
+          <a:lnRef idx="1">
+            <a:schemeClr val="accent1"/>
+          </a:lnRef>
+          <a:fillRef idx="3">
+            <a:schemeClr val="accent1"/>
+          </a:fillRef>
+          <a:effectRef idx="2">
+            <a:schemeClr val="accent1"/>
+          </a:effectRef>
+          <a:fontRef idx="minor">
+            <a:schemeClr val="lt1"/>
+          </a:fontRef>
+        </p:style>
+        <p:txBody>
+          <a:bodyPr rtlCol="0" anchor="ctr"/>
+          <a:lstStyle/>
+          <a:p>
+            <a:pPr algn="ctr"/>
+          </a:p>
+        </p:txBody>
+      </p:sp>
+      <p:sp>
+        <p:nvSpPr>
+          <p:cNvPr id="12" name="TextBox 11"/>
+          <p:cNvSpPr txBox="1"/>
+          <p:nvPr/>
+        </p:nvSpPr>
+        <p:spPr>
+          <a:xfrm>
+            <a:off x="4453128" y="1554480"/>
+            <a:ext cx="3337560" cy="640080"/>
+          </a:xfrm>
+          <a:prstGeom prst="rect">
+            <a:avLst/>
+          </a:prstGeom>
+          <a:noFill/>
+        </p:spPr>
+        <p:txBody>
+          <a:bodyPr wrap="square" anchor="t"/>
+          <a:lstStyle/>
+          <a:p>
+            <a:pPr algn="l">
+              <a:lnSpc>
+                <a:spcPct val="105000"/>
+              </a:lnSpc>
+              <a:spcBef>
+                <a:spcPts val="0"/>
+              </a:spcBef>
+              <a:spcAft>
+                <a:spcPts val="0"/>
+              </a:spcAft>
+            </a:pPr>
+            <a:r>
+              <a:rPr sz="3200" b="1" i="0">
+                <a:solidFill>
+                  <a:srgbClr val="0D9488"/>
+                </a:solidFill>
+                <a:latin typeface="Calibri"/>
+              </a:rPr>
+              <a:t>~4 → ~1</a:t>
+            </a:r>
+          </a:p>
+        </p:txBody>
+      </p:sp>
+      <p:sp>
+        <p:nvSpPr>
+          <p:cNvPr id="13" name="TextBox 12"/>
+          <p:cNvSpPr txBox="1"/>
+          <p:nvPr/>
+        </p:nvSpPr>
+        <p:spPr>
+          <a:xfrm>
+            <a:off x="4453128" y="2212848"/>
+            <a:ext cx="3337560" cy="329184"/>
+          </a:xfrm>
+          <a:prstGeom prst="rect">
+            <a:avLst/>
+          </a:prstGeom>
+          <a:noFill/>
+        </p:spPr>
+        <p:txBody>
+          <a:bodyPr wrap="square" anchor="t"/>
+          <a:lstStyle/>
+          <a:p>
+            <a:pPr algn="l">
+              <a:lnSpc>
+                <a:spcPct val="105000"/>
+              </a:lnSpc>
+              <a:spcBef>
+                <a:spcPts val="0"/>
+              </a:spcBef>
+              <a:spcAft>
+                <a:spcPts val="0"/>
+              </a:spcAft>
+            </a:pPr>
+            <a:r>
+              <a:rPr sz="1200" b="1" i="0">
+                <a:solidFill>
+                  <a:srgbClr val="FFFFFF"/>
+                </a:solidFill>
+                <a:latin typeface="Calibri"/>
+              </a:rPr>
+              <a:t>TELE-REVIEWERS / 100K</a:t>
+            </a:r>
+          </a:p>
+        </p:txBody>
+      </p:sp>
+      <p:sp>
+        <p:nvSpPr>
+          <p:cNvPr id="14" name="TextBox 13"/>
+          <p:cNvSpPr txBox="1"/>
+          <p:nvPr/>
+        </p:nvSpPr>
+        <p:spPr>
+          <a:xfrm>
+            <a:off x="4453128" y="2578608"/>
+            <a:ext cx="3337560" cy="685800"/>
+          </a:xfrm>
+          <a:prstGeom prst="rect">
+            <a:avLst/>
+          </a:prstGeom>
+          <a:noFill/>
+        </p:spPr>
+        <p:txBody>
+          <a:bodyPr wrap="square" anchor="t"/>
+          <a:lstStyle/>
+          <a:p>
+            <a:pPr algn="l">
+              <a:lnSpc>
+                <a:spcPct val="105000"/>
+              </a:lnSpc>
+              <a:spcBef>
+                <a:spcPts val="0"/>
+              </a:spcBef>
+              <a:spcAft>
+                <a:spcPts val="0"/>
+              </a:spcAft>
+            </a:pPr>
+            <a:r>
+              <a:rPr sz="1300" b="0" i="0">
+                <a:solidFill>
+                  <a:srgbClr val="CBD5E1"/>
+                </a:solidFill>
+                <a:latin typeface="Calibri"/>
+              </a:rPr>
+              <a:t>Specialist bottleneck broken without hiding disease</a:t>
+            </a:r>
+          </a:p>
+        </p:txBody>
+      </p:sp>
+      <p:sp>
+        <p:nvSpPr>
+          <p:cNvPr id="15" name="Rounded Rectangle 14"/>
+          <p:cNvSpPr/>
+          <p:nvPr/>
+        </p:nvSpPr>
+        <p:spPr>
+          <a:xfrm>
+            <a:off x="8138160" y="1371600"/>
+            <a:ext cx="3703320" cy="2148840"/>
+          </a:xfrm>
+          <a:prstGeom prst="roundRect">
+            <a:avLst>
+              <a:gd name="adj" fmla="val 8000"/>
+            </a:avLst>
+          </a:prstGeom>
+          <a:solidFill>
+            <a:srgbClr val="0A2540"/>
+          </a:solidFill>
+          <a:ln>
+            <a:noFill/>
+          </a:ln>
+          <a:effectLst/>
+        </p:spPr>
+        <p:style>
+          <a:lnRef idx="1">
+            <a:schemeClr val="accent1"/>
+          </a:lnRef>
+          <a:fillRef idx="3">
+            <a:schemeClr val="accent1"/>
+          </a:fillRef>
+          <a:effectRef idx="2">
+            <a:schemeClr val="accent1"/>
+          </a:effectRef>
+          <a:fontRef idx="minor">
+            <a:schemeClr val="lt1"/>
+          </a:fontRef>
+        </p:style>
+        <p:txBody>
+          <a:bodyPr rtlCol="0" anchor="ctr"/>
+          <a:lstStyle/>
+          <a:p>
+            <a:pPr algn="ctr"/>
+          </a:p>
+        </p:txBody>
+      </p:sp>
+      <p:sp>
+        <p:nvSpPr>
+          <p:cNvPr id="16" name="TextBox 15"/>
+          <p:cNvSpPr txBox="1"/>
+          <p:nvPr/>
+        </p:nvSpPr>
+        <p:spPr>
+          <a:xfrm>
+            <a:off x="8339328" y="1554480"/>
+            <a:ext cx="3337560" cy="640080"/>
+          </a:xfrm>
+          <a:prstGeom prst="rect">
+            <a:avLst/>
+          </a:prstGeom>
+          <a:noFill/>
+        </p:spPr>
+        <p:txBody>
+          <a:bodyPr wrap="square" anchor="t"/>
+          <a:lstStyle/>
+          <a:p>
+            <a:pPr algn="l">
+              <a:lnSpc>
+                <a:spcPct val="105000"/>
+              </a:lnSpc>
+              <a:spcBef>
+                <a:spcPts val="0"/>
+              </a:spcBef>
+              <a:spcAft>
+                <a:spcPts val="0"/>
+              </a:spcAft>
+            </a:pPr>
+            <a:r>
+              <a:rPr sz="3200" b="1" i="0">
+                <a:solidFill>
+                  <a:srgbClr val="0D9488"/>
+                </a:solidFill>
+                <a:latin typeface="Calibri"/>
+              </a:rPr>
+              <a:t>~1.2 s</a:t>
+            </a:r>
+          </a:p>
+        </p:txBody>
+      </p:sp>
+      <p:sp>
+        <p:nvSpPr>
+          <p:cNvPr id="17" name="TextBox 16"/>
+          <p:cNvSpPr txBox="1"/>
+          <p:nvPr/>
+        </p:nvSpPr>
+        <p:spPr>
+          <a:xfrm>
+            <a:off x="8339328" y="2212848"/>
+            <a:ext cx="3337560" cy="329184"/>
+          </a:xfrm>
+          <a:prstGeom prst="rect">
+            <a:avLst/>
+          </a:prstGeom>
+          <a:noFill/>
+        </p:spPr>
+        <p:txBody>
+          <a:bodyPr wrap="square" anchor="t"/>
+          <a:lstStyle/>
+          <a:p>
+            <a:pPr algn="l">
+              <a:lnSpc>
+                <a:spcPct val="105000"/>
+              </a:lnSpc>
+              <a:spcBef>
+                <a:spcPts val="0"/>
+              </a:spcBef>
+              <a:spcAft>
+                <a:spcPts val="0"/>
+              </a:spcAft>
+            </a:pPr>
+            <a:r>
+              <a:rPr sz="1200" b="1" i="0">
+                <a:solidFill>
+                  <a:srgbClr val="FFFFFF"/>
+                </a:solidFill>
+                <a:latin typeface="Calibri"/>
+              </a:rPr>
+              <a:t>ON-SITE TURNAROUND</a:t>
+            </a:r>
+          </a:p>
+        </p:txBody>
+      </p:sp>
+      <p:sp>
+        <p:nvSpPr>
+          <p:cNvPr id="18" name="TextBox 17"/>
+          <p:cNvSpPr txBox="1"/>
+          <p:nvPr/>
+        </p:nvSpPr>
+        <p:spPr>
+          <a:xfrm>
+            <a:off x="8339328" y="2578608"/>
+            <a:ext cx="3337560" cy="685800"/>
+          </a:xfrm>
+          <a:prstGeom prst="rect">
+            <a:avLst/>
+          </a:prstGeom>
+          <a:noFill/>
+        </p:spPr>
+        <p:txBody>
+          <a:bodyPr wrap="square" anchor="t"/>
+          <a:lstStyle/>
+          <a:p>
+            <a:pPr algn="l">
+              <a:lnSpc>
+                <a:spcPct val="105000"/>
+              </a:lnSpc>
+              <a:spcBef>
+                <a:spcPts val="0"/>
+              </a:spcBef>
+              <a:spcAft>
+                <a:spcPts val="0"/>
+              </a:spcAft>
+            </a:pPr>
+            <a:r>
+              <a:rPr sz="1300" b="0" i="0">
+                <a:solidFill>
+                  <a:srgbClr val="CBD5E1"/>
+                </a:solidFill>
+                <a:latin typeface="Calibri"/>
+              </a:rPr>
+              <a:t>vs ~1.9 min cloud-only round trip per patient</a:t>
+            </a:r>
+          </a:p>
+        </p:txBody>
+      </p:sp>
+      <p:sp>
+        <p:nvSpPr>
+          <p:cNvPr id="19" name="Rounded Rectangle 18"/>
+          <p:cNvSpPr/>
+          <p:nvPr/>
+        </p:nvSpPr>
+        <p:spPr>
+          <a:xfrm>
+            <a:off x="365760" y="3730752"/>
+            <a:ext cx="11475720" cy="2670048"/>
           </a:xfrm>
           <a:prstGeom prst="roundRect">
             <a:avLst>
@@ -8871,58 +9652,57 @@
       </p:sp>
       <p:sp>
         <p:nvSpPr>
-          <p:cNvPr id="8" name="Rectangle 7"/>
-          <p:cNvSpPr/>
-          <p:nvPr/>
-        </p:nvSpPr>
-        <p:spPr>
-          <a:xfrm>
-            <a:off x="365760" y="1353312"/>
-            <a:ext cx="109728" cy="2304288"/>
-          </a:xfrm>
-          <a:prstGeom prst="rect">
-            <a:avLst/>
-          </a:prstGeom>
-          <a:solidFill>
-            <a:srgbClr val="0D9488"/>
-          </a:solidFill>
-          <a:ln>
-            <a:noFill/>
-          </a:ln>
-          <a:effectLst/>
-        </p:spPr>
-        <p:style>
-          <a:lnRef idx="1">
-            <a:schemeClr val="accent1"/>
-          </a:lnRef>
-          <a:fillRef idx="3">
-            <a:schemeClr val="accent1"/>
-          </a:fillRef>
-          <a:effectRef idx="2">
-            <a:schemeClr val="accent1"/>
-          </a:effectRef>
-          <a:fontRef idx="minor">
-            <a:schemeClr val="lt1"/>
-          </a:fontRef>
-        </p:style>
-        <p:txBody>
-          <a:bodyPr rtlCol="0" anchor="ctr"/>
-          <a:lstStyle/>
-          <a:p>
-            <a:pPr algn="ctr"/>
-          </a:p>
-        </p:txBody>
-      </p:sp>
-      <p:sp>
-        <p:nvSpPr>
-          <p:cNvPr id="9" name="TextBox 8"/>
-          <p:cNvSpPr txBox="1"/>
-          <p:nvPr/>
-        </p:nvSpPr>
-        <p:spPr>
-          <a:xfrm>
-            <a:off x="713232" y="1499616"/>
-            <a:ext cx="5166360" cy="329184"/>
+          <p:cNvPr id="20" name="TextBox 19"/>
+          <p:cNvSpPr txBox="1"/>
+          <p:nvPr/>
+        </p:nvSpPr>
+        <p:spPr>
+          <a:xfrm>
+            <a:off x="594360" y="3877056"/>
+            <a:ext cx="11064240" cy="329184"/>
+          </a:xfrm>
+          <a:prstGeom prst="rect">
+            <a:avLst/>
+          </a:prstGeom>
+          <a:noFill/>
+        </p:spPr>
+        <p:txBody>
+          <a:bodyPr wrap="square" anchor="t"/>
+          <a:lstStyle/>
+          <a:p>
+            <a:pPr algn="l">
+              <a:lnSpc>
+                <a:spcPct val="105000"/>
+              </a:lnSpc>
+              <a:spcBef>
+                <a:spcPts val="0"/>
+              </a:spcBef>
+              <a:spcAft>
+                <a:spcPts val="0"/>
+              </a:spcAft>
+            </a:pPr>
+            <a:r>
+              <a:rPr sz="1300" b="1" i="0">
+                <a:solidFill>
+                  <a:srgbClr val="0D9488"/>
+                </a:solidFill>
+                <a:latin typeface="Calibri"/>
+              </a:rPr>
+              <a:t>WHAT THE SIMULINK MODEL ACTUALLY SIMULATES</a:t>
+            </a:r>
+          </a:p>
+        </p:txBody>
+      </p:sp>
+      <p:sp>
+        <p:nvSpPr>
+          <p:cNvPr id="21" name="TextBox 20"/>
+          <p:cNvSpPr txBox="1"/>
+          <p:nvPr/>
+        </p:nvSpPr>
+        <p:spPr>
+          <a:xfrm>
+            <a:off x="594360" y="4315968"/>
+            <a:ext cx="5394960" cy="256032"/>
           </a:xfrm>
           <a:prstGeom prst="rect">
             <a:avLst/>
@@ -8947,289 +9727,68 @@
             <a:r>
               <a:rPr sz="1400" b="1" i="0">
                 <a:solidFill>
-                  <a:srgbClr val="0D9488"/>
-                </a:solidFill>
-                <a:latin typeface="Calibri"/>
-              </a:rPr>
-              <a:t>EDGE &amp; OFFLINE</a:t>
-            </a:r>
-          </a:p>
-        </p:txBody>
-      </p:sp>
-      <p:sp>
-        <p:nvSpPr>
-          <p:cNvPr id="10" name="TextBox 9"/>
-          <p:cNvSpPr txBox="1"/>
-          <p:nvPr/>
-        </p:nvSpPr>
-        <p:spPr>
-          <a:xfrm>
-            <a:off x="713232" y="1883664"/>
-            <a:ext cx="5166360" cy="384048"/>
-          </a:xfrm>
-          <a:prstGeom prst="rect">
-            <a:avLst/>
-          </a:prstGeom>
-          <a:noFill/>
-        </p:spPr>
-        <p:txBody>
-          <a:bodyPr wrap="square" anchor="t"/>
-          <a:lstStyle/>
-          <a:p>
-            <a:pPr algn="l">
-              <a:lnSpc>
-                <a:spcPct val="105000"/>
-              </a:lnSpc>
-              <a:spcBef>
-                <a:spcPts val="0"/>
-              </a:spcBef>
-              <a:spcAft>
-                <a:spcPts val="0"/>
-              </a:spcAft>
-            </a:pPr>
-            <a:r>
-              <a:rPr sz="1300" b="0" i="0">
-                <a:solidFill>
-                  <a:srgbClr val="334155"/>
-                </a:solidFill>
-                <a:latin typeface="Calibri"/>
-              </a:rPr>
-              <a:t>▸  Zero runtime API calls or weight downloads</a:t>
-            </a:r>
-          </a:p>
-        </p:txBody>
-      </p:sp>
-      <p:sp>
-        <p:nvSpPr>
-          <p:cNvPr id="11" name="TextBox 10"/>
-          <p:cNvSpPr txBox="1"/>
-          <p:nvPr/>
-        </p:nvSpPr>
-        <p:spPr>
-          <a:xfrm>
-            <a:off x="713232" y="2267712"/>
-            <a:ext cx="5166360" cy="384048"/>
-          </a:xfrm>
-          <a:prstGeom prst="rect">
-            <a:avLst/>
-          </a:prstGeom>
-          <a:noFill/>
-        </p:spPr>
-        <p:txBody>
-          <a:bodyPr wrap="square" anchor="t"/>
-          <a:lstStyle/>
-          <a:p>
-            <a:pPr algn="l">
-              <a:lnSpc>
-                <a:spcPct val="105000"/>
-              </a:lnSpc>
-              <a:spcBef>
-                <a:spcPts val="0"/>
-              </a:spcBef>
-              <a:spcAft>
-                <a:spcPts val="0"/>
-              </a:spcAft>
-            </a:pPr>
-            <a:r>
-              <a:rPr sz="1300" b="0" i="0">
-                <a:solidFill>
-                  <a:srgbClr val="334155"/>
-                </a:solidFill>
-                <a:latin typeface="Calibri"/>
-              </a:rPr>
-              <a:t>▸  Intel i3 / Ryzen 3, 4 GB RAM target</a:t>
-            </a:r>
-          </a:p>
-        </p:txBody>
-      </p:sp>
-      <p:sp>
-        <p:nvSpPr>
-          <p:cNvPr id="12" name="TextBox 11"/>
-          <p:cNvSpPr txBox="1"/>
-          <p:nvPr/>
-        </p:nvSpPr>
-        <p:spPr>
-          <a:xfrm>
-            <a:off x="713232" y="2651760"/>
-            <a:ext cx="5166360" cy="384048"/>
-          </a:xfrm>
-          <a:prstGeom prst="rect">
-            <a:avLst/>
-          </a:prstGeom>
-          <a:noFill/>
-        </p:spPr>
-        <p:txBody>
-          <a:bodyPr wrap="square" anchor="t"/>
-          <a:lstStyle/>
-          <a:p>
-            <a:pPr algn="l">
-              <a:lnSpc>
-                <a:spcPct val="105000"/>
-              </a:lnSpc>
-              <a:spcBef>
-                <a:spcPts val="0"/>
-              </a:spcBef>
-              <a:spcAft>
-                <a:spcPts val="0"/>
-              </a:spcAft>
-            </a:pPr>
-            <a:r>
-              <a:rPr sz="1300" b="0" i="0">
-                <a:solidFill>
-                  <a:srgbClr val="334155"/>
-                </a:solidFill>
-                <a:latin typeface="Calibri"/>
-              </a:rPr>
-              <a:t>▸  Windows · macOS (Intel &amp; Apple Silicon) · Linux · Docker</a:t>
-            </a:r>
-          </a:p>
-        </p:txBody>
-      </p:sp>
-      <p:sp>
-        <p:nvSpPr>
-          <p:cNvPr id="13" name="TextBox 12"/>
-          <p:cNvSpPr txBox="1"/>
-          <p:nvPr/>
-        </p:nvSpPr>
-        <p:spPr>
-          <a:xfrm>
-            <a:off x="713232" y="3035808"/>
-            <a:ext cx="5166360" cy="384048"/>
-          </a:xfrm>
-          <a:prstGeom prst="rect">
-            <a:avLst/>
-          </a:prstGeom>
-          <a:noFill/>
-        </p:spPr>
-        <p:txBody>
-          <a:bodyPr wrap="square" anchor="t"/>
-          <a:lstStyle/>
-          <a:p>
-            <a:pPr algn="l">
-              <a:lnSpc>
-                <a:spcPct val="105000"/>
-              </a:lnSpc>
-              <a:spcBef>
-                <a:spcPts val="0"/>
-              </a:spcBef>
-              <a:spcAft>
-                <a:spcPts val="0"/>
-              </a:spcAft>
-            </a:pPr>
-            <a:r>
-              <a:rPr sz="1300" b="0" i="0">
-                <a:solidFill>
-                  <a:srgbClr val="334155"/>
-                </a:solidFill>
-                <a:latin typeface="Calibri"/>
-              </a:rPr>
-              <a:t>▸  One-command judge path: docker compose up</a:t>
-            </a:r>
-          </a:p>
-        </p:txBody>
-      </p:sp>
-      <p:sp>
-        <p:nvSpPr>
-          <p:cNvPr id="14" name="Rounded Rectangle 13"/>
-          <p:cNvSpPr/>
-          <p:nvPr/>
-        </p:nvSpPr>
-        <p:spPr>
-          <a:xfrm>
-            <a:off x="6263640" y="1353312"/>
-            <a:ext cx="5715000" cy="2304288"/>
-          </a:xfrm>
-          <a:prstGeom prst="roundRect">
-            <a:avLst>
-              <a:gd name="adj" fmla="val 8000"/>
-            </a:avLst>
-          </a:prstGeom>
-          <a:solidFill>
-            <a:srgbClr val="FFFFFF"/>
-          </a:solidFill>
-          <a:ln w="12700">
-            <a:solidFill>
-              <a:srgbClr val="E2E8F0"/>
-            </a:solidFill>
-          </a:ln>
-          <a:effectLst/>
-        </p:spPr>
-        <p:style>
-          <a:lnRef idx="1">
-            <a:schemeClr val="accent1"/>
-          </a:lnRef>
-          <a:fillRef idx="3">
-            <a:schemeClr val="accent1"/>
-          </a:fillRef>
-          <a:effectRef idx="2">
-            <a:schemeClr val="accent1"/>
-          </a:effectRef>
-          <a:fontRef idx="minor">
-            <a:schemeClr val="lt1"/>
-          </a:fontRef>
-        </p:style>
-        <p:txBody>
-          <a:bodyPr rtlCol="0" anchor="ctr"/>
-          <a:lstStyle/>
-          <a:p>
-            <a:pPr algn="ctr"/>
-          </a:p>
-        </p:txBody>
-      </p:sp>
-      <p:sp>
-        <p:nvSpPr>
-          <p:cNvPr id="15" name="Rectangle 14"/>
-          <p:cNvSpPr/>
-          <p:nvPr/>
-        </p:nvSpPr>
-        <p:spPr>
-          <a:xfrm>
-            <a:off x="6263640" y="1353312"/>
-            <a:ext cx="109728" cy="2304288"/>
-          </a:xfrm>
-          <a:prstGeom prst="rect">
-            <a:avLst/>
-          </a:prstGeom>
-          <a:solidFill>
-            <a:srgbClr val="1A56DB"/>
-          </a:solidFill>
-          <a:ln>
-            <a:noFill/>
-          </a:ln>
-          <a:effectLst/>
-        </p:spPr>
-        <p:style>
-          <a:lnRef idx="1">
-            <a:schemeClr val="accent1"/>
-          </a:lnRef>
-          <a:fillRef idx="3">
-            <a:schemeClr val="accent1"/>
-          </a:fillRef>
-          <a:effectRef idx="2">
-            <a:schemeClr val="accent1"/>
-          </a:effectRef>
-          <a:fontRef idx="minor">
-            <a:schemeClr val="lt1"/>
-          </a:fontRef>
-        </p:style>
-        <p:txBody>
-          <a:bodyPr rtlCol="0" anchor="ctr"/>
-          <a:lstStyle/>
-          <a:p>
-            <a:pPr algn="ctr"/>
-          </a:p>
-        </p:txBody>
-      </p:sp>
-      <p:sp>
-        <p:nvSpPr>
-          <p:cNvPr id="16" name="TextBox 15"/>
-          <p:cNvSpPr txBox="1"/>
-          <p:nvPr/>
-        </p:nvSpPr>
-        <p:spPr>
-          <a:xfrm>
-            <a:off x="6611112" y="1499616"/>
-            <a:ext cx="5166360" cy="329184"/>
+                  <a:srgbClr val="0A2540"/>
+                </a:solidFill>
+                <a:latin typeface="Calibri"/>
+              </a:rPr>
+              <a:t>M/M/c queues</a:t>
+            </a:r>
+          </a:p>
+        </p:txBody>
+      </p:sp>
+      <p:sp>
+        <p:nvSpPr>
+          <p:cNvPr id="22" name="TextBox 21"/>
+          <p:cNvSpPr txBox="1"/>
+          <p:nvPr/>
+        </p:nvSpPr>
+        <p:spPr>
+          <a:xfrm>
+            <a:off x="594360" y="4608576"/>
+            <a:ext cx="5394960" cy="502920"/>
+          </a:xfrm>
+          <a:prstGeom prst="rect">
+            <a:avLst/>
+          </a:prstGeom>
+          <a:noFill/>
+        </p:spPr>
+        <p:txBody>
+          <a:bodyPr wrap="square" anchor="t"/>
+          <a:lstStyle/>
+          <a:p>
+            <a:pPr algn="l">
+              <a:lnSpc>
+                <a:spcPct val="105000"/>
+              </a:lnSpc>
+              <a:spcBef>
+                <a:spcPts val="0"/>
+              </a:spcBef>
+              <a:spcAft>
+                <a:spcPts val="0"/>
+              </a:spcAft>
+            </a:pPr>
+            <a:r>
+              <a:rPr sz="1200" b="0" i="0">
+                <a:solidFill>
+                  <a:srgbClr val="475569"/>
+                </a:solidFill>
+                <a:latin typeface="Calibri"/>
+              </a:rPr>
+              <a:t>Patient arrivals, edge inference, tele-ophthalmology uplink as a discrete-event system — not a static spreadsheet.</a:t>
+            </a:r>
+          </a:p>
+        </p:txBody>
+      </p:sp>
+      <p:sp>
+        <p:nvSpPr>
+          <p:cNvPr id="23" name="TextBox 22"/>
+          <p:cNvSpPr txBox="1"/>
+          <p:nvPr/>
+        </p:nvSpPr>
+        <p:spPr>
+          <a:xfrm>
+            <a:off x="6217920" y="4315968"/>
+            <a:ext cx="5394960" cy="256032"/>
           </a:xfrm>
           <a:prstGeom prst="rect">
             <a:avLst/>
@@ -9254,289 +9813,68 @@
             <a:r>
               <a:rPr sz="1400" b="1" i="0">
                 <a:solidFill>
-                  <a:srgbClr val="1A56DB"/>
-                </a:solidFill>
-                <a:latin typeface="Calibri"/>
-              </a:rPr>
-              <a:t>HARDWARE AGNOSTIC</a:t>
-            </a:r>
-          </a:p>
-        </p:txBody>
-      </p:sp>
-      <p:sp>
-        <p:nvSpPr>
-          <p:cNvPr id="17" name="TextBox 16"/>
-          <p:cNvSpPr txBox="1"/>
-          <p:nvPr/>
-        </p:nvSpPr>
-        <p:spPr>
-          <a:xfrm>
-            <a:off x="6611112" y="1883664"/>
-            <a:ext cx="5166360" cy="384048"/>
-          </a:xfrm>
-          <a:prstGeom prst="rect">
-            <a:avLst/>
-          </a:prstGeom>
-          <a:noFill/>
-        </p:spPr>
-        <p:txBody>
-          <a:bodyPr wrap="square" anchor="t"/>
-          <a:lstStyle/>
-          <a:p>
-            <a:pPr algn="l">
-              <a:lnSpc>
-                <a:spcPct val="105000"/>
-              </a:lnSpc>
-              <a:spcBef>
-                <a:spcPts val="0"/>
-              </a:spcBef>
-              <a:spcAft>
-                <a:spcPts val="0"/>
-              </a:spcAft>
-            </a:pPr>
-            <a:r>
-              <a:rPr sz="1300" b="0" i="0">
-                <a:solidFill>
-                  <a:srgbClr val="334155"/>
-                </a:solidFill>
-                <a:latin typeface="Calibri"/>
-              </a:rPr>
-              <a:t>▸  ₹15,000 handheld fundus class (Remidio, Forus, Volk)</a:t>
-            </a:r>
-          </a:p>
-        </p:txBody>
-      </p:sp>
-      <p:sp>
-        <p:nvSpPr>
-          <p:cNvPr id="18" name="TextBox 17"/>
-          <p:cNvSpPr txBox="1"/>
-          <p:nvPr/>
-        </p:nvSpPr>
-        <p:spPr>
-          <a:xfrm>
-            <a:off x="6611112" y="2267712"/>
-            <a:ext cx="5166360" cy="384048"/>
-          </a:xfrm>
-          <a:prstGeom prst="rect">
-            <a:avLst/>
-          </a:prstGeom>
-          <a:noFill/>
-        </p:spPr>
-        <p:txBody>
-          <a:bodyPr wrap="square" anchor="t"/>
-          <a:lstStyle/>
-          <a:p>
-            <a:pPr algn="l">
-              <a:lnSpc>
-                <a:spcPct val="105000"/>
-              </a:lnSpc>
-              <a:spcBef>
-                <a:spcPts val="0"/>
-              </a:spcBef>
-              <a:spcAft>
-                <a:spcPts val="0"/>
-              </a:spcAft>
-            </a:pPr>
-            <a:r>
-              <a:rPr sz="1300" b="0" i="0">
-                <a:solidFill>
-                  <a:srgbClr val="334155"/>
-                </a:solidFill>
-                <a:latin typeface="Calibri"/>
-              </a:rPr>
-              <a:t>▸  No proprietary camera SDK</a:t>
-            </a:r>
-          </a:p>
-        </p:txBody>
-      </p:sp>
-      <p:sp>
-        <p:nvSpPr>
-          <p:cNvPr id="19" name="TextBox 18"/>
-          <p:cNvSpPr txBox="1"/>
-          <p:nvPr/>
-        </p:nvSpPr>
-        <p:spPr>
-          <a:xfrm>
-            <a:off x="6611112" y="2651760"/>
-            <a:ext cx="5166360" cy="384048"/>
-          </a:xfrm>
-          <a:prstGeom prst="rect">
-            <a:avLst/>
-          </a:prstGeom>
-          <a:noFill/>
-        </p:spPr>
-        <p:txBody>
-          <a:bodyPr wrap="square" anchor="t"/>
-          <a:lstStyle/>
-          <a:p>
-            <a:pPr algn="l">
-              <a:lnSpc>
-                <a:spcPct val="105000"/>
-              </a:lnSpc>
-              <a:spcBef>
-                <a:spcPts val="0"/>
-              </a:spcBef>
-              <a:spcAft>
-                <a:spcPts val="0"/>
-              </a:spcAft>
-            </a:pPr>
-            <a:r>
-              <a:rPr sz="1300" b="0" i="0">
-                <a:solidFill>
-                  <a:srgbClr val="334155"/>
-                </a:solidFill>
-                <a:latin typeface="Calibri"/>
-              </a:rPr>
-              <a:t>▸  DICOM / JPEG / PNG ingest</a:t>
-            </a:r>
-          </a:p>
-        </p:txBody>
-      </p:sp>
-      <p:sp>
-        <p:nvSpPr>
-          <p:cNvPr id="20" name="TextBox 19"/>
-          <p:cNvSpPr txBox="1"/>
-          <p:nvPr/>
-        </p:nvSpPr>
-        <p:spPr>
-          <a:xfrm>
-            <a:off x="6611112" y="3035808"/>
-            <a:ext cx="5166360" cy="384048"/>
-          </a:xfrm>
-          <a:prstGeom prst="rect">
-            <a:avLst/>
-          </a:prstGeom>
-          <a:noFill/>
-        </p:spPr>
-        <p:txBody>
-          <a:bodyPr wrap="square" anchor="t"/>
-          <a:lstStyle/>
-          <a:p>
-            <a:pPr algn="l">
-              <a:lnSpc>
-                <a:spcPct val="105000"/>
-              </a:lnSpc>
-              <a:spcBef>
-                <a:spcPts val="0"/>
-              </a:spcBef>
-              <a:spcAft>
-                <a:spcPts val="0"/>
-              </a:spcAft>
-            </a:pPr>
-            <a:r>
-              <a:rPr sz="1300" b="0" i="0">
-                <a:solidFill>
-                  <a:srgbClr val="334155"/>
-                </a:solidFill>
-                <a:latin typeface="Calibri"/>
-              </a:rPr>
-              <a:t>▸  Sensor-agnostic preprocessing</a:t>
-            </a:r>
-          </a:p>
-        </p:txBody>
-      </p:sp>
-      <p:sp>
-        <p:nvSpPr>
-          <p:cNvPr id="21" name="Rounded Rectangle 20"/>
-          <p:cNvSpPr/>
-          <p:nvPr/>
-        </p:nvSpPr>
-        <p:spPr>
-          <a:xfrm>
-            <a:off x="365760" y="3822191"/>
-            <a:ext cx="5715000" cy="2304288"/>
-          </a:xfrm>
-          <a:prstGeom prst="roundRect">
-            <a:avLst>
-              <a:gd name="adj" fmla="val 8000"/>
-            </a:avLst>
-          </a:prstGeom>
-          <a:solidFill>
-            <a:srgbClr val="FFFFFF"/>
-          </a:solidFill>
-          <a:ln w="12700">
-            <a:solidFill>
-              <a:srgbClr val="E2E8F0"/>
-            </a:solidFill>
-          </a:ln>
-          <a:effectLst/>
-        </p:spPr>
-        <p:style>
-          <a:lnRef idx="1">
-            <a:schemeClr val="accent1"/>
-          </a:lnRef>
-          <a:fillRef idx="3">
-            <a:schemeClr val="accent1"/>
-          </a:fillRef>
-          <a:effectRef idx="2">
-            <a:schemeClr val="accent1"/>
-          </a:effectRef>
-          <a:fontRef idx="minor">
-            <a:schemeClr val="lt1"/>
-          </a:fontRef>
-        </p:style>
-        <p:txBody>
-          <a:bodyPr rtlCol="0" anchor="ctr"/>
-          <a:lstStyle/>
-          <a:p>
-            <a:pPr algn="ctr"/>
-          </a:p>
-        </p:txBody>
-      </p:sp>
-      <p:sp>
-        <p:nvSpPr>
-          <p:cNvPr id="22" name="Rectangle 21"/>
-          <p:cNvSpPr/>
-          <p:nvPr/>
-        </p:nvSpPr>
-        <p:spPr>
-          <a:xfrm>
-            <a:off x="365760" y="3822191"/>
-            <a:ext cx="109728" cy="2304288"/>
-          </a:xfrm>
-          <a:prstGeom prst="rect">
-            <a:avLst/>
-          </a:prstGeom>
-          <a:solidFill>
-            <a:srgbClr val="B45309"/>
-          </a:solidFill>
-          <a:ln>
-            <a:noFill/>
-          </a:ln>
-          <a:effectLst/>
-        </p:spPr>
-        <p:style>
-          <a:lnRef idx="1">
-            <a:schemeClr val="accent1"/>
-          </a:lnRef>
-          <a:fillRef idx="3">
-            <a:schemeClr val="accent1"/>
-          </a:fillRef>
-          <a:effectRef idx="2">
-            <a:schemeClr val="accent1"/>
-          </a:effectRef>
-          <a:fontRef idx="minor">
-            <a:schemeClr val="lt1"/>
-          </a:fontRef>
-        </p:style>
-        <p:txBody>
-          <a:bodyPr rtlCol="0" anchor="ctr"/>
-          <a:lstStyle/>
-          <a:p>
-            <a:pPr algn="ctr"/>
-          </a:p>
-        </p:txBody>
-      </p:sp>
-      <p:sp>
-        <p:nvSpPr>
-          <p:cNvPr id="23" name="TextBox 22"/>
-          <p:cNvSpPr txBox="1"/>
-          <p:nvPr/>
-        </p:nvSpPr>
-        <p:spPr>
-          <a:xfrm>
-            <a:off x="713232" y="3968496"/>
-            <a:ext cx="5166360" cy="329184"/>
+                  <a:srgbClr val="0A2540"/>
+                </a:solidFill>
+                <a:latin typeface="Calibri"/>
+              </a:rPr>
+              <a:t>Local processing</a:t>
+            </a:r>
+          </a:p>
+        </p:txBody>
+      </p:sp>
+      <p:sp>
+        <p:nvSpPr>
+          <p:cNvPr id="24" name="TextBox 23"/>
+          <p:cNvSpPr txBox="1"/>
+          <p:nvPr/>
+        </p:nvSpPr>
+        <p:spPr>
+          <a:xfrm>
+            <a:off x="6217920" y="4608576"/>
+            <a:ext cx="5394960" cy="502920"/>
+          </a:xfrm>
+          <a:prstGeom prst="rect">
+            <a:avLst/>
+          </a:prstGeom>
+          <a:noFill/>
+        </p:spPr>
+        <p:txBody>
+          <a:bodyPr wrap="square" anchor="t"/>
+          <a:lstStyle/>
+          <a:p>
+            <a:pPr algn="l">
+              <a:lnSpc>
+                <a:spcPct val="105000"/>
+              </a:lnSpc>
+              <a:spcBef>
+                <a:spcPts val="0"/>
+              </a:spcBef>
+              <a:spcAft>
+                <a:spcPts val="0"/>
+              </a:spcAft>
+            </a:pPr>
+            <a:r>
+              <a:rPr sz="1200" b="0" i="0">
+                <a:solidFill>
+                  <a:srgbClr val="475569"/>
+                </a:solidFill>
+                <a:latin typeface="Calibri"/>
+              </a:rPr>
+              <a:t>Only referable, low-confidence, high-risk, and recapture-exhausted cases leave the PHC.</a:t>
+            </a:r>
+          </a:p>
+        </p:txBody>
+      </p:sp>
+      <p:sp>
+        <p:nvSpPr>
+          <p:cNvPr id="25" name="TextBox 24"/>
+          <p:cNvSpPr txBox="1"/>
+          <p:nvPr/>
+        </p:nvSpPr>
+        <p:spPr>
+          <a:xfrm>
+            <a:off x="594360" y="5230368"/>
+            <a:ext cx="5394960" cy="256032"/>
           </a:xfrm>
           <a:prstGeom prst="rect">
             <a:avLst/>
@@ -9561,97 +9899,11 @@
             <a:r>
               <a:rPr sz="1400" b="1" i="0">
                 <a:solidFill>
-                  <a:srgbClr val="B45309"/>
-                </a:solidFill>
-                <a:latin typeface="Calibri"/>
-              </a:rPr>
-              <a:t>ASHA → DOCTOR UX</a:t>
-            </a:r>
-          </a:p>
-        </p:txBody>
-      </p:sp>
-      <p:sp>
-        <p:nvSpPr>
-          <p:cNvPr id="24" name="TextBox 23"/>
-          <p:cNvSpPr txBox="1"/>
-          <p:nvPr/>
-        </p:nvSpPr>
-        <p:spPr>
-          <a:xfrm>
-            <a:off x="713232" y="4352544"/>
-            <a:ext cx="5166360" cy="384048"/>
-          </a:xfrm>
-          <a:prstGeom prst="rect">
-            <a:avLst/>
-          </a:prstGeom>
-          <a:noFill/>
-        </p:spPr>
-        <p:txBody>
-          <a:bodyPr wrap="square" anchor="t"/>
-          <a:lstStyle/>
-          <a:p>
-            <a:pPr algn="l">
-              <a:lnSpc>
-                <a:spcPct val="105000"/>
-              </a:lnSpc>
-              <a:spcBef>
-                <a:spcPts val="0"/>
-              </a:spcBef>
-              <a:spcAft>
-                <a:spcPts val="0"/>
-              </a:spcAft>
-            </a:pPr>
-            <a:r>
-              <a:rPr sz="1300" b="0" i="0">
-                <a:solidFill>
-                  <a:srgbClr val="334155"/>
-                </a:solidFill>
-                <a:latin typeface="Calibri"/>
-              </a:rPr>
-              <a:t>▸  Low-cognitive-load recapture HUD</a:t>
-            </a:r>
-          </a:p>
-        </p:txBody>
-      </p:sp>
-      <p:sp>
-        <p:nvSpPr>
-          <p:cNvPr id="25" name="TextBox 24"/>
-          <p:cNvSpPr txBox="1"/>
-          <p:nvPr/>
-        </p:nvSpPr>
-        <p:spPr>
-          <a:xfrm>
-            <a:off x="713232" y="4736592"/>
-            <a:ext cx="5166360" cy="384048"/>
-          </a:xfrm>
-          <a:prstGeom prst="rect">
-            <a:avLst/>
-          </a:prstGeom>
-          <a:noFill/>
-        </p:spPr>
-        <p:txBody>
-          <a:bodyPr wrap="square" anchor="t"/>
-          <a:lstStyle/>
-          <a:p>
-            <a:pPr algn="l">
-              <a:lnSpc>
-                <a:spcPct val="105000"/>
-              </a:lnSpc>
-              <a:spcBef>
-                <a:spcPts val="0"/>
-              </a:spcBef>
-              <a:spcAft>
-                <a:spcPts val="0"/>
-              </a:spcAft>
-            </a:pPr>
-            <a:r>
-              <a:rPr sz="1300" b="0" i="0">
-                <a:solidFill>
-                  <a:srgbClr val="334155"/>
-                </a:solidFill>
-                <a:latin typeface="Calibri"/>
-              </a:rPr>
-              <a:t>▸  Hindi + English; Tamil/Telugu/Kannada roadmap</a:t>
+                  <a:srgbClr val="0A2540"/>
+                </a:solidFill>
+                <a:latin typeface="Calibri"/>
+              </a:rPr>
+              <a:t>Capacity proof</a:t>
             </a:r>
           </a:p>
         </p:txBody>
@@ -9664,37 +9916,37 @@
         </p:nvSpPr>
         <p:spPr>
           <a:xfrm>
-            <a:off x="713232" y="5120640"/>
-            <a:ext cx="5166360" cy="384048"/>
-          </a:xfrm>
-          <a:prstGeom prst="rect">
-            <a:avLst/>
-          </a:prstGeom>
-          <a:noFill/>
-        </p:spPr>
-        <p:txBody>
-          <a:bodyPr wrap="square" anchor="t"/>
-          <a:lstStyle/>
-          <a:p>
-            <a:pPr algn="l">
-              <a:lnSpc>
-                <a:spcPct val="105000"/>
-              </a:lnSpc>
-              <a:spcBef>
-                <a:spcPts val="0"/>
-              </a:spcBef>
-              <a:spcAft>
-                <a:spcPts val="0"/>
-              </a:spcAft>
-            </a:pPr>
-            <a:r>
-              <a:rPr sz="1300" b="0" i="0">
-                <a:solidFill>
-                  <a:srgbClr val="334155"/>
-                </a:solidFill>
-                <a:latin typeface="Calibri"/>
-              </a:rPr>
-              <a:t>▸  Clear / Review / Urgent + ICDR grade</a:t>
+            <a:off x="594360" y="5522976"/>
+            <a:ext cx="5394960" cy="502920"/>
+          </a:xfrm>
+          <a:prstGeom prst="rect">
+            <a:avLst/>
+          </a:prstGeom>
+          <a:noFill/>
+        </p:spPr>
+        <p:txBody>
+          <a:bodyPr wrap="square" anchor="t"/>
+          <a:lstStyle/>
+          <a:p>
+            <a:pPr algn="l">
+              <a:lnSpc>
+                <a:spcPct val="105000"/>
+              </a:lnSpc>
+              <a:spcBef>
+                <a:spcPts val="0"/>
+              </a:spcBef>
+              <a:spcAft>
+                <a:spcPts val="0"/>
+              </a:spcAft>
+            </a:pPr>
+            <a:r>
+              <a:rPr sz="1200" b="0" i="0">
+                <a:solidFill>
+                  <a:srgbClr val="475569"/>
+                </a:solidFill>
+                <a:latin typeface="Calibri"/>
+              </a:rPr>
+              <a:t>Workload drops from 100,000 raw cases to ~16,100 triage cases/year (~62/day) — feasible for a single tele-reviewer.</a:t>
             </a:r>
           </a:p>
         </p:txBody>
@@ -9707,86 +9959,81 @@
         </p:nvSpPr>
         <p:spPr>
           <a:xfrm>
-            <a:off x="713232" y="5504688"/>
-            <a:ext cx="5166360" cy="384048"/>
-          </a:xfrm>
-          <a:prstGeom prst="rect">
-            <a:avLst/>
-          </a:prstGeom>
-          <a:noFill/>
-        </p:spPr>
-        <p:txBody>
-          <a:bodyPr wrap="square" anchor="t"/>
-          <a:lstStyle/>
-          <a:p>
-            <a:pPr algn="l">
-              <a:lnSpc>
-                <a:spcPct val="105000"/>
-              </a:lnSpc>
-              <a:spcBef>
-                <a:spcPts val="0"/>
-              </a:spcBef>
-              <a:spcAft>
-                <a:spcPts val="0"/>
-              </a:spcAft>
-            </a:pPr>
-            <a:r>
-              <a:rPr sz="1300" b="0" i="0">
-                <a:solidFill>
-                  <a:srgbClr val="334155"/>
-                </a:solidFill>
-                <a:latin typeface="Calibri"/>
-              </a:rPr>
-              <a:t>▸  Specialist console: Grad-CAM + CSME overlay</a:t>
-            </a:r>
-          </a:p>
-        </p:txBody>
-      </p:sp>
-      <p:sp>
-        <p:nvSpPr>
-          <p:cNvPr id="28" name="Rounded Rectangle 27"/>
-          <p:cNvSpPr/>
-          <p:nvPr/>
-        </p:nvSpPr>
-        <p:spPr>
-          <a:xfrm>
-            <a:off x="6263640" y="3822191"/>
-            <a:ext cx="5715000" cy="2304288"/>
-          </a:xfrm>
-          <a:prstGeom prst="roundRect">
-            <a:avLst>
-              <a:gd name="adj" fmla="val 8000"/>
-            </a:avLst>
-          </a:prstGeom>
-          <a:solidFill>
-            <a:srgbClr val="FFFFFF"/>
-          </a:solidFill>
-          <a:ln w="12700">
-            <a:solidFill>
-              <a:srgbClr val="E2E8F0"/>
-            </a:solidFill>
-          </a:ln>
-          <a:effectLst/>
-        </p:spPr>
-        <p:style>
-          <a:lnRef idx="1">
-            <a:schemeClr val="accent1"/>
-          </a:lnRef>
-          <a:fillRef idx="3">
-            <a:schemeClr val="accent1"/>
-          </a:fillRef>
-          <a:effectRef idx="2">
-            <a:schemeClr val="accent1"/>
-          </a:effectRef>
-          <a:fontRef idx="minor">
-            <a:schemeClr val="lt1"/>
-          </a:fontRef>
-        </p:style>
-        <p:txBody>
-          <a:bodyPr rtlCol="0" anchor="ctr"/>
-          <a:lstStyle/>
-          <a:p>
-            <a:pPr algn="ctr"/>
+            <a:off x="6217920" y="5230368"/>
+            <a:ext cx="5394960" cy="256032"/>
+          </a:xfrm>
+          <a:prstGeom prst="rect">
+            <a:avLst/>
+          </a:prstGeom>
+          <a:noFill/>
+        </p:spPr>
+        <p:txBody>
+          <a:bodyPr wrap="square" anchor="t"/>
+          <a:lstStyle/>
+          <a:p>
+            <a:pPr algn="l">
+              <a:lnSpc>
+                <a:spcPct val="105000"/>
+              </a:lnSpc>
+              <a:spcBef>
+                <a:spcPts val="0"/>
+              </a:spcBef>
+              <a:spcAft>
+                <a:spcPts val="0"/>
+              </a:spcAft>
+            </a:pPr>
+            <a:r>
+              <a:rPr sz="1400" b="1" i="0">
+                <a:solidFill>
+                  <a:srgbClr val="0A2540"/>
+                </a:solidFill>
+                <a:latin typeface="Calibri"/>
+              </a:rPr>
+              <a:t>Hostile networks</a:t>
+            </a:r>
+          </a:p>
+        </p:txBody>
+      </p:sp>
+      <p:sp>
+        <p:nvSpPr>
+          <p:cNvPr id="28" name="TextBox 27"/>
+          <p:cNvSpPr txBox="1"/>
+          <p:nvPr/>
+        </p:nvSpPr>
+        <p:spPr>
+          <a:xfrm>
+            <a:off x="6217920" y="5522976"/>
+            <a:ext cx="5394960" cy="502920"/>
+          </a:xfrm>
+          <a:prstGeom prst="rect">
+            <a:avLst/>
+          </a:prstGeom>
+          <a:noFill/>
+        </p:spPr>
+        <p:txBody>
+          <a:bodyPr wrap="square" anchor="t"/>
+          <a:lstStyle/>
+          <a:p>
+            <a:pPr algn="l">
+              <a:lnSpc>
+                <a:spcPct val="105000"/>
+              </a:lnSpc>
+              <a:spcBef>
+                <a:spcPts val="0"/>
+              </a:spcBef>
+              <a:spcAft>
+                <a:spcPts val="0"/>
+              </a:spcAft>
+            </a:pPr>
+            <a:r>
+              <a:rPr sz="1200" b="0" i="0">
+                <a:solidFill>
+                  <a:srgbClr val="475569"/>
+                </a:solidFill>
+                <a:latin typeface="Calibri"/>
+              </a:rPr>
+              <a:t>Lightweight compressed packets remain viable on intermittent 2G/3G. Screening never waits on the WAN.</a:t>
+            </a:r>
           </a:p>
         </p:txBody>
       </p:sp>
@@ -9798,8 +10045,8 @@
         </p:nvSpPr>
         <p:spPr>
           <a:xfrm>
-            <a:off x="6263640" y="3822191"/>
-            <a:ext cx="109728" cy="2304288"/>
+            <a:off x="0" y="6656832"/>
+            <a:ext cx="12191695" cy="201168"/>
           </a:xfrm>
           <a:prstGeom prst="rect">
             <a:avLst/>
@@ -9842,265 +10089,6 @@
         </p:nvSpPr>
         <p:spPr>
           <a:xfrm>
-            <a:off x="6611112" y="3968496"/>
-            <a:ext cx="5166360" cy="329184"/>
-          </a:xfrm>
-          <a:prstGeom prst="rect">
-            <a:avLst/>
-          </a:prstGeom>
-          <a:noFill/>
-        </p:spPr>
-        <p:txBody>
-          <a:bodyPr wrap="square" anchor="t"/>
-          <a:lstStyle/>
-          <a:p>
-            <a:pPr algn="l">
-              <a:lnSpc>
-                <a:spcPct val="105000"/>
-              </a:lnSpc>
-              <a:spcBef>
-                <a:spcPts val="0"/>
-              </a:spcBef>
-              <a:spcAft>
-                <a:spcPts val="0"/>
-              </a:spcAft>
-            </a:pPr>
-            <a:r>
-              <a:rPr sz="1400" b="1" i="0">
-                <a:solidFill>
-                  <a:srgbClr val="0A2540"/>
-                </a:solidFill>
-                <a:latin typeface="Calibri"/>
-              </a:rPr>
-              <a:t>INTEROPERABILITY</a:t>
-            </a:r>
-          </a:p>
-        </p:txBody>
-      </p:sp>
-      <p:sp>
-        <p:nvSpPr>
-          <p:cNvPr id="31" name="TextBox 30"/>
-          <p:cNvSpPr txBox="1"/>
-          <p:nvPr/>
-        </p:nvSpPr>
-        <p:spPr>
-          <a:xfrm>
-            <a:off x="6611112" y="4352544"/>
-            <a:ext cx="5166360" cy="384048"/>
-          </a:xfrm>
-          <a:prstGeom prst="rect">
-            <a:avLst/>
-          </a:prstGeom>
-          <a:noFill/>
-        </p:spPr>
-        <p:txBody>
-          <a:bodyPr wrap="square" anchor="t"/>
-          <a:lstStyle/>
-          <a:p>
-            <a:pPr algn="l">
-              <a:lnSpc>
-                <a:spcPct val="105000"/>
-              </a:lnSpc>
-              <a:spcBef>
-                <a:spcPts val="0"/>
-              </a:spcBef>
-              <a:spcAft>
-                <a:spcPts val="0"/>
-              </a:spcAft>
-            </a:pPr>
-            <a:r>
-              <a:rPr sz="1300" b="0" i="0">
-                <a:solidFill>
-                  <a:srgbClr val="334155"/>
-                </a:solidFill>
-                <a:latin typeface="Calibri"/>
-              </a:rPr>
-              <a:t>▸  HL7 FHIR R4 · SNOMED CT · LOINC</a:t>
-            </a:r>
-          </a:p>
-        </p:txBody>
-      </p:sp>
-      <p:sp>
-        <p:nvSpPr>
-          <p:cNvPr id="32" name="TextBox 31"/>
-          <p:cNvSpPr txBox="1"/>
-          <p:nvPr/>
-        </p:nvSpPr>
-        <p:spPr>
-          <a:xfrm>
-            <a:off x="6611112" y="4736592"/>
-            <a:ext cx="5166360" cy="384048"/>
-          </a:xfrm>
-          <a:prstGeom prst="rect">
-            <a:avLst/>
-          </a:prstGeom>
-          <a:noFill/>
-        </p:spPr>
-        <p:txBody>
-          <a:bodyPr wrap="square" anchor="t"/>
-          <a:lstStyle/>
-          <a:p>
-            <a:pPr algn="l">
-              <a:lnSpc>
-                <a:spcPct val="105000"/>
-              </a:lnSpc>
-              <a:spcBef>
-                <a:spcPts val="0"/>
-              </a:spcBef>
-              <a:spcAft>
-                <a:spcPts val="0"/>
-              </a:spcAft>
-            </a:pPr>
-            <a:r>
-              <a:rPr sz="1300" b="0" i="0">
-                <a:solidFill>
-                  <a:srgbClr val="334155"/>
-                </a:solidFill>
-                <a:latin typeface="Calibri"/>
-              </a:rPr>
-              <a:t>▸  Ayushman Bharat Digital Mission aligned</a:t>
-            </a:r>
-          </a:p>
-        </p:txBody>
-      </p:sp>
-      <p:sp>
-        <p:nvSpPr>
-          <p:cNvPr id="33" name="TextBox 32"/>
-          <p:cNvSpPr txBox="1"/>
-          <p:nvPr/>
-        </p:nvSpPr>
-        <p:spPr>
-          <a:xfrm>
-            <a:off x="6611112" y="5120640"/>
-            <a:ext cx="5166360" cy="384048"/>
-          </a:xfrm>
-          <a:prstGeom prst="rect">
-            <a:avLst/>
-          </a:prstGeom>
-          <a:noFill/>
-        </p:spPr>
-        <p:txBody>
-          <a:bodyPr wrap="square" anchor="t"/>
-          <a:lstStyle/>
-          <a:p>
-            <a:pPr algn="l">
-              <a:lnSpc>
-                <a:spcPct val="105000"/>
-              </a:lnSpc>
-              <a:spcBef>
-                <a:spcPts val="0"/>
-              </a:spcBef>
-              <a:spcAft>
-                <a:spcPts val="0"/>
-              </a:spcAft>
-            </a:pPr>
-            <a:r>
-              <a:rPr sz="1300" b="0" i="0">
-                <a:solidFill>
-                  <a:srgbClr val="334155"/>
-                </a:solidFill>
-                <a:latin typeface="Calibri"/>
-              </a:rPr>
-              <a:t>▸  Bilingual PDF screening dossier</a:t>
-            </a:r>
-          </a:p>
-        </p:txBody>
-      </p:sp>
-      <p:sp>
-        <p:nvSpPr>
-          <p:cNvPr id="34" name="TextBox 33"/>
-          <p:cNvSpPr txBox="1"/>
-          <p:nvPr/>
-        </p:nvSpPr>
-        <p:spPr>
-          <a:xfrm>
-            <a:off x="6611112" y="5504688"/>
-            <a:ext cx="5166360" cy="384048"/>
-          </a:xfrm>
-          <a:prstGeom prst="rect">
-            <a:avLst/>
-          </a:prstGeom>
-          <a:noFill/>
-        </p:spPr>
-        <p:txBody>
-          <a:bodyPr wrap="square" anchor="t"/>
-          <a:lstStyle/>
-          <a:p>
-            <a:pPr algn="l">
-              <a:lnSpc>
-                <a:spcPct val="105000"/>
-              </a:lnSpc>
-              <a:spcBef>
-                <a:spcPts val="0"/>
-              </a:spcBef>
-              <a:spcAft>
-                <a:spcPts val="0"/>
-              </a:spcAft>
-            </a:pPr>
-            <a:r>
-              <a:rPr sz="1300" b="0" i="0">
-                <a:solidFill>
-                  <a:srgbClr val="334155"/>
-                </a:solidFill>
-                <a:latin typeface="Calibri"/>
-              </a:rPr>
-              <a:t>▸  DPDP-aware: no unencrypted PHI on the open WAN</a:t>
-            </a:r>
-          </a:p>
-        </p:txBody>
-      </p:sp>
-      <p:sp>
-        <p:nvSpPr>
-          <p:cNvPr id="35" name="Rectangle 34"/>
-          <p:cNvSpPr/>
-          <p:nvPr/>
-        </p:nvSpPr>
-        <p:spPr>
-          <a:xfrm>
-            <a:off x="0" y="6656832"/>
-            <a:ext cx="12191695" cy="201168"/>
-          </a:xfrm>
-          <a:prstGeom prst="rect">
-            <a:avLst/>
-          </a:prstGeom>
-          <a:solidFill>
-            <a:srgbClr val="0A2540"/>
-          </a:solidFill>
-          <a:ln>
-            <a:noFill/>
-          </a:ln>
-          <a:effectLst/>
-        </p:spPr>
-        <p:style>
-          <a:lnRef idx="1">
-            <a:schemeClr val="accent1"/>
-          </a:lnRef>
-          <a:fillRef idx="3">
-            <a:schemeClr val="accent1"/>
-          </a:fillRef>
-          <a:effectRef idx="2">
-            <a:schemeClr val="accent1"/>
-          </a:effectRef>
-          <a:fontRef idx="minor">
-            <a:schemeClr val="lt1"/>
-          </a:fontRef>
-        </p:style>
-        <p:txBody>
-          <a:bodyPr rtlCol="0" anchor="ctr"/>
-          <a:lstStyle/>
-          <a:p>
-            <a:pPr algn="ctr"/>
-          </a:p>
-        </p:txBody>
-      </p:sp>
-      <p:sp>
-        <p:nvSpPr>
-          <p:cNvPr id="36" name="TextBox 35"/>
-          <p:cNvSpPr txBox="1"/>
-          <p:nvPr/>
-        </p:nvSpPr>
-        <p:spPr>
-          <a:xfrm>
             <a:off x="411480" y="6656832"/>
             <a:ext cx="8686800" cy="201168"/>
           </a:xfrm>
@@ -10138,7 +10126,7 @@
       </p:sp>
       <p:sp>
         <p:nvSpPr>
-          <p:cNvPr id="37" name="TextBox 36"/>
+          <p:cNvPr id="31" name="TextBox 30"/>
           <p:cNvSpPr txBox="1"/>
           <p:nvPr/>
         </p:nvSpPr>
@@ -10174,7 +10162,7 @@
                 </a:solidFill>
                 <a:latin typeface="Calibri"/>
               </a:rPr>
-              <a:t>12  /  14</a:t>
+              <a:t>12  /  15</a:t>
             </a:r>
           </a:p>
         </p:txBody>
@@ -10331,7 +10319,7 @@
                 </a:solidFill>
                 <a:latin typeface="Calibri"/>
               </a:rPr>
-              <a:t>12  —  WHO BUILDS WHAT</a:t>
+              <a:t>12  —  BUILT FOR THE FIELD, NOT THE DEMO BOOTH</a:t>
             </a:r>
           </a:p>
         </p:txBody>
@@ -10374,7 +10362,7 @@
                 </a:solidFill>
                 <a:latin typeface="Calibri"/>
               </a:rPr>
-              <a:t>Six owners. Seven modules. One locked decision flow.</a:t>
+              <a:t>Offline. Commodity hardware. Frontline UX. National digital health rails.</a:t>
             </a:r>
           </a:p>
         </p:txBody>
@@ -10417,7 +10405,7 @@
                 </a:solidFill>
                 <a:latin typeface="Calibri"/>
               </a:rPr>
-              <a:t>No orphan components — every module has a named lead and a deliverable.</a:t>
+              <a:t>The Flutter app is how judges interact. The product is everything that works outside a hospital.</a:t>
             </a:r>
           </a:p>
         </p:txBody>
@@ -10430,8 +10418,8 @@
         </p:nvSpPr>
         <p:spPr>
           <a:xfrm>
-            <a:off x="365760" y="1371600"/>
-            <a:ext cx="3703320" cy="2286000"/>
+            <a:off x="365760" y="1353312"/>
+            <a:ext cx="5715000" cy="2304288"/>
           </a:xfrm>
           <a:prstGeom prst="roundRect">
             <a:avLst>
@@ -10478,8 +10466,8 @@
         </p:nvSpPr>
         <p:spPr>
           <a:xfrm>
-            <a:off x="365760" y="1371600"/>
-            <a:ext cx="3703320" cy="91440"/>
+            <a:off x="365760" y="1353312"/>
+            <a:ext cx="109728" cy="2304288"/>
           </a:xfrm>
           <a:prstGeom prst="rect">
             <a:avLst/>
@@ -10522,37 +10510,37 @@
         </p:nvSpPr>
         <p:spPr>
           <a:xfrm>
-            <a:off x="566928" y="1645920"/>
-            <a:ext cx="3291840" cy="384048"/>
-          </a:xfrm>
-          <a:prstGeom prst="rect">
-            <a:avLst/>
-          </a:prstGeom>
-          <a:noFill/>
-        </p:spPr>
-        <p:txBody>
-          <a:bodyPr wrap="square" anchor="t"/>
-          <a:lstStyle/>
-          <a:p>
-            <a:pPr algn="l">
-              <a:lnSpc>
-                <a:spcPct val="105000"/>
-              </a:lnSpc>
-              <a:spcBef>
-                <a:spcPts val="0"/>
-              </a:spcBef>
-              <a:spcAft>
-                <a:spcPts val="0"/>
-              </a:spcAft>
-            </a:pPr>
-            <a:r>
-              <a:rPr sz="2000" b="1" i="0">
-                <a:solidFill>
-                  <a:srgbClr val="0A2540"/>
-                </a:solidFill>
-                <a:latin typeface="Calibri"/>
-              </a:rPr>
-              <a:t>Bezaleel</a:t>
+            <a:off x="713232" y="1499616"/>
+            <a:ext cx="5166360" cy="329184"/>
+          </a:xfrm>
+          <a:prstGeom prst="rect">
+            <a:avLst/>
+          </a:prstGeom>
+          <a:noFill/>
+        </p:spPr>
+        <p:txBody>
+          <a:bodyPr wrap="square" anchor="t"/>
+          <a:lstStyle/>
+          <a:p>
+            <a:pPr algn="l">
+              <a:lnSpc>
+                <a:spcPct val="105000"/>
+              </a:lnSpc>
+              <a:spcBef>
+                <a:spcPts val="0"/>
+              </a:spcBef>
+              <a:spcAft>
+                <a:spcPts val="0"/>
+              </a:spcAft>
+            </a:pPr>
+            <a:r>
+              <a:rPr sz="1400" b="1" i="0">
+                <a:solidFill>
+                  <a:srgbClr val="0D9488"/>
+                </a:solidFill>
+                <a:latin typeface="Calibri"/>
+              </a:rPr>
+              <a:t>EDGE &amp; OFFLINE</a:t>
             </a:r>
           </a:p>
         </p:txBody>
@@ -10565,37 +10553,37 @@
         </p:nvSpPr>
         <p:spPr>
           <a:xfrm>
-            <a:off x="566928" y="2084832"/>
-            <a:ext cx="3291840" cy="329184"/>
-          </a:xfrm>
-          <a:prstGeom prst="rect">
-            <a:avLst/>
-          </a:prstGeom>
-          <a:noFill/>
-        </p:spPr>
-        <p:txBody>
-          <a:bodyPr wrap="square" anchor="t"/>
-          <a:lstStyle/>
-          <a:p>
-            <a:pPr algn="l">
-              <a:lnSpc>
-                <a:spcPct val="105000"/>
-              </a:lnSpc>
-              <a:spcBef>
-                <a:spcPts val="0"/>
-              </a:spcBef>
-              <a:spcAft>
-                <a:spcPts val="0"/>
-              </a:spcAft>
-            </a:pPr>
-            <a:r>
-              <a:rPr sz="1100" b="1" i="0">
-                <a:solidFill>
-                  <a:srgbClr val="0D9488"/>
-                </a:solidFill>
-                <a:latin typeface="Calibri"/>
-              </a:rPr>
-              <a:t>TEAM LEAD  ·  FULL-STACK</a:t>
+            <a:off x="713232" y="1883664"/>
+            <a:ext cx="5166360" cy="384048"/>
+          </a:xfrm>
+          <a:prstGeom prst="rect">
+            <a:avLst/>
+          </a:prstGeom>
+          <a:noFill/>
+        </p:spPr>
+        <p:txBody>
+          <a:bodyPr wrap="square" anchor="t"/>
+          <a:lstStyle/>
+          <a:p>
+            <a:pPr algn="l">
+              <a:lnSpc>
+                <a:spcPct val="105000"/>
+              </a:lnSpc>
+              <a:spcBef>
+                <a:spcPts val="0"/>
+              </a:spcBef>
+              <a:spcAft>
+                <a:spcPts val="0"/>
+              </a:spcAft>
+            </a:pPr>
+            <a:r>
+              <a:rPr sz="1300" b="0" i="0">
+                <a:solidFill>
+                  <a:srgbClr val="334155"/>
+                </a:solidFill>
+                <a:latin typeface="Calibri"/>
+              </a:rPr>
+              <a:t>▸  Zero runtime API calls or weight downloads</a:t>
             </a:r>
           </a:p>
         </p:txBody>
@@ -10608,8 +10596,8 @@
         </p:nvSpPr>
         <p:spPr>
           <a:xfrm>
-            <a:off x="566928" y="2514600"/>
-            <a:ext cx="3291840" cy="868680"/>
+            <a:off x="713232" y="2267712"/>
+            <a:ext cx="5166360" cy="384048"/>
           </a:xfrm>
           <a:prstGeom prst="rect">
             <a:avLst/>
@@ -10638,21 +10626,107 @@
                 </a:solidFill>
                 <a:latin typeface="Calibri"/>
               </a:rPr>
-              <a:t>Decision router, Streamlit, FastAPI, Docker, cross-platform zero-config.</a:t>
-            </a:r>
-          </a:p>
-        </p:txBody>
-      </p:sp>
-      <p:sp>
-        <p:nvSpPr>
-          <p:cNvPr id="12" name="Rounded Rectangle 11"/>
+              <a:t>▸  Intel i3 / Ryzen 3, 4 GB RAM target</a:t>
+            </a:r>
+          </a:p>
+        </p:txBody>
+      </p:sp>
+      <p:sp>
+        <p:nvSpPr>
+          <p:cNvPr id="12" name="TextBox 11"/>
+          <p:cNvSpPr txBox="1"/>
+          <p:nvPr/>
+        </p:nvSpPr>
+        <p:spPr>
+          <a:xfrm>
+            <a:off x="713232" y="2651760"/>
+            <a:ext cx="5166360" cy="384048"/>
+          </a:xfrm>
+          <a:prstGeom prst="rect">
+            <a:avLst/>
+          </a:prstGeom>
+          <a:noFill/>
+        </p:spPr>
+        <p:txBody>
+          <a:bodyPr wrap="square" anchor="t"/>
+          <a:lstStyle/>
+          <a:p>
+            <a:pPr algn="l">
+              <a:lnSpc>
+                <a:spcPct val="105000"/>
+              </a:lnSpc>
+              <a:spcBef>
+                <a:spcPts val="0"/>
+              </a:spcBef>
+              <a:spcAft>
+                <a:spcPts val="0"/>
+              </a:spcAft>
+            </a:pPr>
+            <a:r>
+              <a:rPr sz="1300" b="0" i="0">
+                <a:solidFill>
+                  <a:srgbClr val="334155"/>
+                </a:solidFill>
+                <a:latin typeface="Calibri"/>
+              </a:rPr>
+              <a:t>▸  Windows · macOS (Intel &amp; Apple Silicon) · Linux · Docker</a:t>
+            </a:r>
+          </a:p>
+        </p:txBody>
+      </p:sp>
+      <p:sp>
+        <p:nvSpPr>
+          <p:cNvPr id="13" name="TextBox 12"/>
+          <p:cNvSpPr txBox="1"/>
+          <p:nvPr/>
+        </p:nvSpPr>
+        <p:spPr>
+          <a:xfrm>
+            <a:off x="713232" y="3035808"/>
+            <a:ext cx="5166360" cy="384048"/>
+          </a:xfrm>
+          <a:prstGeom prst="rect">
+            <a:avLst/>
+          </a:prstGeom>
+          <a:noFill/>
+        </p:spPr>
+        <p:txBody>
+          <a:bodyPr wrap="square" anchor="t"/>
+          <a:lstStyle/>
+          <a:p>
+            <a:pPr algn="l">
+              <a:lnSpc>
+                <a:spcPct val="105000"/>
+              </a:lnSpc>
+              <a:spcBef>
+                <a:spcPts val="0"/>
+              </a:spcBef>
+              <a:spcAft>
+                <a:spcPts val="0"/>
+              </a:spcAft>
+            </a:pPr>
+            <a:r>
+              <a:rPr sz="1300" b="0" i="0">
+                <a:solidFill>
+                  <a:srgbClr val="334155"/>
+                </a:solidFill>
+                <a:latin typeface="Calibri"/>
+              </a:rPr>
+              <a:t>▸  One-command judge path: docker compose up</a:t>
+            </a:r>
+          </a:p>
+        </p:txBody>
+      </p:sp>
+      <p:sp>
+        <p:nvSpPr>
+          <p:cNvPr id="14" name="Rounded Rectangle 13"/>
           <p:cNvSpPr/>
           <p:nvPr/>
         </p:nvSpPr>
         <p:spPr>
           <a:xfrm>
-            <a:off x="4251960" y="1371600"/>
-            <a:ext cx="3703320" cy="2286000"/>
+            <a:off x="6263640" y="1353312"/>
+            <a:ext cx="5715000" cy="2304288"/>
           </a:xfrm>
           <a:prstGeom prst="roundRect">
             <a:avLst>
@@ -10693,14 +10767,14 @@
       </p:sp>
       <p:sp>
         <p:nvSpPr>
-          <p:cNvPr id="13" name="Rectangle 12"/>
+          <p:cNvPr id="15" name="Rectangle 14"/>
           <p:cNvSpPr/>
           <p:nvPr/>
         </p:nvSpPr>
         <p:spPr>
           <a:xfrm>
-            <a:off x="4251960" y="1371600"/>
-            <a:ext cx="3703320" cy="91440"/>
+            <a:off x="6263640" y="1353312"/>
+            <a:ext cx="109728" cy="2304288"/>
           </a:xfrm>
           <a:prstGeom prst="rect">
             <a:avLst/>
@@ -10737,100 +10811,57 @@
       </p:sp>
       <p:sp>
         <p:nvSpPr>
-          <p:cNvPr id="14" name="TextBox 13"/>
-          <p:cNvSpPr txBox="1"/>
-          <p:nvPr/>
-        </p:nvSpPr>
-        <p:spPr>
-          <a:xfrm>
-            <a:off x="4453128" y="1645920"/>
-            <a:ext cx="3291840" cy="384048"/>
-          </a:xfrm>
-          <a:prstGeom prst="rect">
-            <a:avLst/>
-          </a:prstGeom>
-          <a:noFill/>
-        </p:spPr>
-        <p:txBody>
-          <a:bodyPr wrap="square" anchor="t"/>
-          <a:lstStyle/>
-          <a:p>
-            <a:pPr algn="l">
-              <a:lnSpc>
-                <a:spcPct val="105000"/>
-              </a:lnSpc>
-              <a:spcBef>
-                <a:spcPts val="0"/>
-              </a:spcBef>
-              <a:spcAft>
-                <a:spcPts val="0"/>
-              </a:spcAft>
-            </a:pPr>
-            <a:r>
-              <a:rPr sz="2000" b="1" i="0">
-                <a:solidFill>
-                  <a:srgbClr val="0A2540"/>
-                </a:solidFill>
-                <a:latin typeface="Calibri"/>
-              </a:rPr>
-              <a:t>Madhu</a:t>
-            </a:r>
-          </a:p>
-        </p:txBody>
-      </p:sp>
-      <p:sp>
-        <p:nvSpPr>
-          <p:cNvPr id="15" name="TextBox 14"/>
-          <p:cNvSpPr txBox="1"/>
-          <p:nvPr/>
-        </p:nvSpPr>
-        <p:spPr>
-          <a:xfrm>
-            <a:off x="4453128" y="2084832"/>
-            <a:ext cx="3291840" cy="329184"/>
-          </a:xfrm>
-          <a:prstGeom prst="rect">
-            <a:avLst/>
-          </a:prstGeom>
-          <a:noFill/>
-        </p:spPr>
-        <p:txBody>
-          <a:bodyPr wrap="square" anchor="t"/>
-          <a:lstStyle/>
-          <a:p>
-            <a:pPr algn="l">
-              <a:lnSpc>
-                <a:spcPct val="105000"/>
-              </a:lnSpc>
-              <a:spcBef>
-                <a:spcPts val="0"/>
-              </a:spcBef>
-              <a:spcAft>
-                <a:spcPts val="0"/>
-              </a:spcAft>
-            </a:pPr>
-            <a:r>
-              <a:rPr sz="1100" b="1" i="0">
-                <a:solidFill>
-                  <a:srgbClr val="0D9488"/>
-                </a:solidFill>
-                <a:latin typeface="Calibri"/>
-              </a:rPr>
-              <a:t>CLINICAL LEAD  ·  BIOMED</a:t>
-            </a:r>
-          </a:p>
-        </p:txBody>
-      </p:sp>
-      <p:sp>
-        <p:nvSpPr>
           <p:cNvPr id="16" name="TextBox 15"/>
           <p:cNvSpPr txBox="1"/>
           <p:nvPr/>
         </p:nvSpPr>
         <p:spPr>
           <a:xfrm>
-            <a:off x="4453128" y="2514600"/>
-            <a:ext cx="3291840" cy="868680"/>
+            <a:off x="6611112" y="1499616"/>
+            <a:ext cx="5166360" cy="329184"/>
+          </a:xfrm>
+          <a:prstGeom prst="rect">
+            <a:avLst/>
+          </a:prstGeom>
+          <a:noFill/>
+        </p:spPr>
+        <p:txBody>
+          <a:bodyPr wrap="square" anchor="t"/>
+          <a:lstStyle/>
+          <a:p>
+            <a:pPr algn="l">
+              <a:lnSpc>
+                <a:spcPct val="105000"/>
+              </a:lnSpc>
+              <a:spcBef>
+                <a:spcPts val="0"/>
+              </a:spcBef>
+              <a:spcAft>
+                <a:spcPts val="0"/>
+              </a:spcAft>
+            </a:pPr>
+            <a:r>
+              <a:rPr sz="1400" b="1" i="0">
+                <a:solidFill>
+                  <a:srgbClr val="1A56DB"/>
+                </a:solidFill>
+                <a:latin typeface="Calibri"/>
+              </a:rPr>
+              <a:t>HARDWARE AGNOSTIC</a:t>
+            </a:r>
+          </a:p>
+        </p:txBody>
+      </p:sp>
+      <p:sp>
+        <p:nvSpPr>
+          <p:cNvPr id="17" name="TextBox 16"/>
+          <p:cNvSpPr txBox="1"/>
+          <p:nvPr/>
+        </p:nvSpPr>
+        <p:spPr>
+          <a:xfrm>
+            <a:off x="6611112" y="1883664"/>
+            <a:ext cx="5166360" cy="384048"/>
           </a:xfrm>
           <a:prstGeom prst="rect">
             <a:avLst/>
@@ -10859,21 +10890,150 @@
                 </a:solidFill>
                 <a:latin typeface="Calibri"/>
               </a:rPr>
-              <a:t>ICMR 2024 risk engine, OD/fovea CSME distance, clinical report validation.</a:t>
-            </a:r>
-          </a:p>
-        </p:txBody>
-      </p:sp>
-      <p:sp>
-        <p:nvSpPr>
-          <p:cNvPr id="17" name="Rounded Rectangle 16"/>
+              <a:t>▸  ₹15,000 handheld fundus class (Remidio, Forus, Volk)</a:t>
+            </a:r>
+          </a:p>
+        </p:txBody>
+      </p:sp>
+      <p:sp>
+        <p:nvSpPr>
+          <p:cNvPr id="18" name="TextBox 17"/>
+          <p:cNvSpPr txBox="1"/>
+          <p:nvPr/>
+        </p:nvSpPr>
+        <p:spPr>
+          <a:xfrm>
+            <a:off x="6611112" y="2267712"/>
+            <a:ext cx="5166360" cy="384048"/>
+          </a:xfrm>
+          <a:prstGeom prst="rect">
+            <a:avLst/>
+          </a:prstGeom>
+          <a:noFill/>
+        </p:spPr>
+        <p:txBody>
+          <a:bodyPr wrap="square" anchor="t"/>
+          <a:lstStyle/>
+          <a:p>
+            <a:pPr algn="l">
+              <a:lnSpc>
+                <a:spcPct val="105000"/>
+              </a:lnSpc>
+              <a:spcBef>
+                <a:spcPts val="0"/>
+              </a:spcBef>
+              <a:spcAft>
+                <a:spcPts val="0"/>
+              </a:spcAft>
+            </a:pPr>
+            <a:r>
+              <a:rPr sz="1300" b="0" i="0">
+                <a:solidFill>
+                  <a:srgbClr val="334155"/>
+                </a:solidFill>
+                <a:latin typeface="Calibri"/>
+              </a:rPr>
+              <a:t>▸  No proprietary camera SDK</a:t>
+            </a:r>
+          </a:p>
+        </p:txBody>
+      </p:sp>
+      <p:sp>
+        <p:nvSpPr>
+          <p:cNvPr id="19" name="TextBox 18"/>
+          <p:cNvSpPr txBox="1"/>
+          <p:nvPr/>
+        </p:nvSpPr>
+        <p:spPr>
+          <a:xfrm>
+            <a:off x="6611112" y="2651760"/>
+            <a:ext cx="5166360" cy="384048"/>
+          </a:xfrm>
+          <a:prstGeom prst="rect">
+            <a:avLst/>
+          </a:prstGeom>
+          <a:noFill/>
+        </p:spPr>
+        <p:txBody>
+          <a:bodyPr wrap="square" anchor="t"/>
+          <a:lstStyle/>
+          <a:p>
+            <a:pPr algn="l">
+              <a:lnSpc>
+                <a:spcPct val="105000"/>
+              </a:lnSpc>
+              <a:spcBef>
+                <a:spcPts val="0"/>
+              </a:spcBef>
+              <a:spcAft>
+                <a:spcPts val="0"/>
+              </a:spcAft>
+            </a:pPr>
+            <a:r>
+              <a:rPr sz="1300" b="0" i="0">
+                <a:solidFill>
+                  <a:srgbClr val="334155"/>
+                </a:solidFill>
+                <a:latin typeface="Calibri"/>
+              </a:rPr>
+              <a:t>▸  DICOM / JPEG / PNG ingest</a:t>
+            </a:r>
+          </a:p>
+        </p:txBody>
+      </p:sp>
+      <p:sp>
+        <p:nvSpPr>
+          <p:cNvPr id="20" name="TextBox 19"/>
+          <p:cNvSpPr txBox="1"/>
+          <p:nvPr/>
+        </p:nvSpPr>
+        <p:spPr>
+          <a:xfrm>
+            <a:off x="6611112" y="3035808"/>
+            <a:ext cx="5166360" cy="384048"/>
+          </a:xfrm>
+          <a:prstGeom prst="rect">
+            <a:avLst/>
+          </a:prstGeom>
+          <a:noFill/>
+        </p:spPr>
+        <p:txBody>
+          <a:bodyPr wrap="square" anchor="t"/>
+          <a:lstStyle/>
+          <a:p>
+            <a:pPr algn="l">
+              <a:lnSpc>
+                <a:spcPct val="105000"/>
+              </a:lnSpc>
+              <a:spcBef>
+                <a:spcPts val="0"/>
+              </a:spcBef>
+              <a:spcAft>
+                <a:spcPts val="0"/>
+              </a:spcAft>
+            </a:pPr>
+            <a:r>
+              <a:rPr sz="1300" b="0" i="0">
+                <a:solidFill>
+                  <a:srgbClr val="334155"/>
+                </a:solidFill>
+                <a:latin typeface="Calibri"/>
+              </a:rPr>
+              <a:t>▸  Sensor-agnostic preprocessing</a:t>
+            </a:r>
+          </a:p>
+        </p:txBody>
+      </p:sp>
+      <p:sp>
+        <p:nvSpPr>
+          <p:cNvPr id="21" name="Rounded Rectangle 20"/>
           <p:cNvSpPr/>
           <p:nvPr/>
         </p:nvSpPr>
         <p:spPr>
           <a:xfrm>
-            <a:off x="8138160" y="1371600"/>
-            <a:ext cx="3703320" cy="2286000"/>
+            <a:off x="365760" y="3822191"/>
+            <a:ext cx="5715000" cy="2304288"/>
           </a:xfrm>
           <a:prstGeom prst="roundRect">
             <a:avLst>
@@ -10914,20 +11074,20 @@
       </p:sp>
       <p:sp>
         <p:nvSpPr>
-          <p:cNvPr id="18" name="Rectangle 17"/>
+          <p:cNvPr id="22" name="Rectangle 21"/>
           <p:cNvSpPr/>
           <p:nvPr/>
         </p:nvSpPr>
         <p:spPr>
           <a:xfrm>
-            <a:off x="8138160" y="1371600"/>
-            <a:ext cx="3703320" cy="91440"/>
+            <a:off x="365760" y="3822191"/>
+            <a:ext cx="109728" cy="2304288"/>
           </a:xfrm>
           <a:prstGeom prst="rect">
             <a:avLst/>
           </a:prstGeom>
           <a:solidFill>
-            <a:srgbClr val="0D9488"/>
+            <a:srgbClr val="B45309"/>
           </a:solidFill>
           <a:ln>
             <a:noFill/>
@@ -10958,100 +11118,57 @@
       </p:sp>
       <p:sp>
         <p:nvSpPr>
-          <p:cNvPr id="19" name="TextBox 18"/>
-          <p:cNvSpPr txBox="1"/>
-          <p:nvPr/>
-        </p:nvSpPr>
-        <p:spPr>
-          <a:xfrm>
-            <a:off x="8339328" y="1645920"/>
-            <a:ext cx="3291840" cy="384048"/>
-          </a:xfrm>
-          <a:prstGeom prst="rect">
-            <a:avLst/>
-          </a:prstGeom>
-          <a:noFill/>
-        </p:spPr>
-        <p:txBody>
-          <a:bodyPr wrap="square" anchor="t"/>
-          <a:lstStyle/>
-          <a:p>
-            <a:pPr algn="l">
-              <a:lnSpc>
-                <a:spcPct val="105000"/>
-              </a:lnSpc>
-              <a:spcBef>
-                <a:spcPts val="0"/>
-              </a:spcBef>
-              <a:spcAft>
-                <a:spcPts val="0"/>
-              </a:spcAft>
-            </a:pPr>
-            <a:r>
-              <a:rPr sz="2000" b="1" i="0">
-                <a:solidFill>
-                  <a:srgbClr val="0A2540"/>
-                </a:solidFill>
-                <a:latin typeface="Calibri"/>
-              </a:rPr>
-              <a:t>Akshay</a:t>
-            </a:r>
-          </a:p>
-        </p:txBody>
-      </p:sp>
-      <p:sp>
-        <p:nvSpPr>
-          <p:cNvPr id="20" name="TextBox 19"/>
-          <p:cNvSpPr txBox="1"/>
-          <p:nvPr/>
-        </p:nvSpPr>
-        <p:spPr>
-          <a:xfrm>
-            <a:off x="8339328" y="2084832"/>
-            <a:ext cx="3291840" cy="329184"/>
-          </a:xfrm>
-          <a:prstGeom prst="rect">
-            <a:avLst/>
-          </a:prstGeom>
-          <a:noFill/>
-        </p:spPr>
-        <p:txBody>
-          <a:bodyPr wrap="square" anchor="t"/>
-          <a:lstStyle/>
-          <a:p>
-            <a:pPr algn="l">
-              <a:lnSpc>
-                <a:spcPct val="105000"/>
-              </a:lnSpc>
-              <a:spcBef>
-                <a:spcPts val="0"/>
-              </a:spcBef>
-              <a:spcAft>
-                <a:spcPts val="0"/>
-              </a:spcAft>
-            </a:pPr>
-            <a:r>
-              <a:rPr sz="1100" b="1" i="0">
-                <a:solidFill>
-                  <a:srgbClr val="0D9488"/>
-                </a:solidFill>
-                <a:latin typeface="Calibri"/>
-              </a:rPr>
-              <a:t>DEEP LEARNING  ·  OPS</a:t>
-            </a:r>
-          </a:p>
-        </p:txBody>
-      </p:sp>
-      <p:sp>
-        <p:nvSpPr>
-          <p:cNvPr id="21" name="TextBox 20"/>
-          <p:cNvSpPr txBox="1"/>
-          <p:nvPr/>
-        </p:nvSpPr>
-        <p:spPr>
-          <a:xfrm>
-            <a:off x="8339328" y="2514600"/>
-            <a:ext cx="3291840" cy="868680"/>
+          <p:cNvPr id="23" name="TextBox 22"/>
+          <p:cNvSpPr txBox="1"/>
+          <p:nvPr/>
+        </p:nvSpPr>
+        <p:spPr>
+          <a:xfrm>
+            <a:off x="713232" y="3968496"/>
+            <a:ext cx="5166360" cy="329184"/>
+          </a:xfrm>
+          <a:prstGeom prst="rect">
+            <a:avLst/>
+          </a:prstGeom>
+          <a:noFill/>
+        </p:spPr>
+        <p:txBody>
+          <a:bodyPr wrap="square" anchor="t"/>
+          <a:lstStyle/>
+          <a:p>
+            <a:pPr algn="l">
+              <a:lnSpc>
+                <a:spcPct val="105000"/>
+              </a:lnSpc>
+              <a:spcBef>
+                <a:spcPts val="0"/>
+              </a:spcBef>
+              <a:spcAft>
+                <a:spcPts val="0"/>
+              </a:spcAft>
+            </a:pPr>
+            <a:r>
+              <a:rPr sz="1400" b="1" i="0">
+                <a:solidFill>
+                  <a:srgbClr val="B45309"/>
+                </a:solidFill>
+                <a:latin typeface="Calibri"/>
+              </a:rPr>
+              <a:t>ASHA → DOCTOR UX</a:t>
+            </a:r>
+          </a:p>
+        </p:txBody>
+      </p:sp>
+      <p:sp>
+        <p:nvSpPr>
+          <p:cNvPr id="24" name="TextBox 23"/>
+          <p:cNvSpPr txBox="1"/>
+          <p:nvPr/>
+        </p:nvSpPr>
+        <p:spPr>
+          <a:xfrm>
+            <a:off x="713232" y="4352544"/>
+            <a:ext cx="5166360" cy="384048"/>
           </a:xfrm>
           <a:prstGeom prst="rect">
             <a:avLst/>
@@ -11080,21 +11197,150 @@
                 </a:solidFill>
                 <a:latin typeface="Calibri"/>
               </a:rPr>
-              <a:t>EfficientNetB0, Grad-CAM++, MATLAB/Simulink 100k-patient queueing model.</a:t>
-            </a:r>
-          </a:p>
-        </p:txBody>
-      </p:sp>
-      <p:sp>
-        <p:nvSpPr>
-          <p:cNvPr id="22" name="Rounded Rectangle 21"/>
+              <a:t>▸  Low-cognitive-load recapture HUD</a:t>
+            </a:r>
+          </a:p>
+        </p:txBody>
+      </p:sp>
+      <p:sp>
+        <p:nvSpPr>
+          <p:cNvPr id="25" name="TextBox 24"/>
+          <p:cNvSpPr txBox="1"/>
+          <p:nvPr/>
+        </p:nvSpPr>
+        <p:spPr>
+          <a:xfrm>
+            <a:off x="713232" y="4736592"/>
+            <a:ext cx="5166360" cy="384048"/>
+          </a:xfrm>
+          <a:prstGeom prst="rect">
+            <a:avLst/>
+          </a:prstGeom>
+          <a:noFill/>
+        </p:spPr>
+        <p:txBody>
+          <a:bodyPr wrap="square" anchor="t"/>
+          <a:lstStyle/>
+          <a:p>
+            <a:pPr algn="l">
+              <a:lnSpc>
+                <a:spcPct val="105000"/>
+              </a:lnSpc>
+              <a:spcBef>
+                <a:spcPts val="0"/>
+              </a:spcBef>
+              <a:spcAft>
+                <a:spcPts val="0"/>
+              </a:spcAft>
+            </a:pPr>
+            <a:r>
+              <a:rPr sz="1300" b="0" i="0">
+                <a:solidFill>
+                  <a:srgbClr val="334155"/>
+                </a:solidFill>
+                <a:latin typeface="Calibri"/>
+              </a:rPr>
+              <a:t>▸  Hindi + English; Tamil/Telugu/Kannada roadmap</a:t>
+            </a:r>
+          </a:p>
+        </p:txBody>
+      </p:sp>
+      <p:sp>
+        <p:nvSpPr>
+          <p:cNvPr id="26" name="TextBox 25"/>
+          <p:cNvSpPr txBox="1"/>
+          <p:nvPr/>
+        </p:nvSpPr>
+        <p:spPr>
+          <a:xfrm>
+            <a:off x="713232" y="5120640"/>
+            <a:ext cx="5166360" cy="384048"/>
+          </a:xfrm>
+          <a:prstGeom prst="rect">
+            <a:avLst/>
+          </a:prstGeom>
+          <a:noFill/>
+        </p:spPr>
+        <p:txBody>
+          <a:bodyPr wrap="square" anchor="t"/>
+          <a:lstStyle/>
+          <a:p>
+            <a:pPr algn="l">
+              <a:lnSpc>
+                <a:spcPct val="105000"/>
+              </a:lnSpc>
+              <a:spcBef>
+                <a:spcPts val="0"/>
+              </a:spcBef>
+              <a:spcAft>
+                <a:spcPts val="0"/>
+              </a:spcAft>
+            </a:pPr>
+            <a:r>
+              <a:rPr sz="1300" b="0" i="0">
+                <a:solidFill>
+                  <a:srgbClr val="334155"/>
+                </a:solidFill>
+                <a:latin typeface="Calibri"/>
+              </a:rPr>
+              <a:t>▸  Clear / Review / Urgent + ICDR grade</a:t>
+            </a:r>
+          </a:p>
+        </p:txBody>
+      </p:sp>
+      <p:sp>
+        <p:nvSpPr>
+          <p:cNvPr id="27" name="TextBox 26"/>
+          <p:cNvSpPr txBox="1"/>
+          <p:nvPr/>
+        </p:nvSpPr>
+        <p:spPr>
+          <a:xfrm>
+            <a:off x="713232" y="5504688"/>
+            <a:ext cx="5166360" cy="384048"/>
+          </a:xfrm>
+          <a:prstGeom prst="rect">
+            <a:avLst/>
+          </a:prstGeom>
+          <a:noFill/>
+        </p:spPr>
+        <p:txBody>
+          <a:bodyPr wrap="square" anchor="t"/>
+          <a:lstStyle/>
+          <a:p>
+            <a:pPr algn="l">
+              <a:lnSpc>
+                <a:spcPct val="105000"/>
+              </a:lnSpc>
+              <a:spcBef>
+                <a:spcPts val="0"/>
+              </a:spcBef>
+              <a:spcAft>
+                <a:spcPts val="0"/>
+              </a:spcAft>
+            </a:pPr>
+            <a:r>
+              <a:rPr sz="1300" b="0" i="0">
+                <a:solidFill>
+                  <a:srgbClr val="334155"/>
+                </a:solidFill>
+                <a:latin typeface="Calibri"/>
+              </a:rPr>
+              <a:t>▸  Specialist console: Grad-CAM + CSME overlay</a:t>
+            </a:r>
+          </a:p>
+        </p:txBody>
+      </p:sp>
+      <p:sp>
+        <p:nvSpPr>
+          <p:cNvPr id="28" name="Rounded Rectangle 27"/>
           <p:cNvSpPr/>
           <p:nvPr/>
         </p:nvSpPr>
         <p:spPr>
           <a:xfrm>
-            <a:off x="365760" y="3840480"/>
-            <a:ext cx="3703320" cy="2286000"/>
+            <a:off x="6263640" y="3822191"/>
+            <a:ext cx="5715000" cy="2304288"/>
           </a:xfrm>
           <a:prstGeom prst="roundRect">
             <a:avLst>
@@ -11135,20 +11381,20 @@
       </p:sp>
       <p:sp>
         <p:nvSpPr>
-          <p:cNvPr id="23" name="Rectangle 22"/>
+          <p:cNvPr id="29" name="Rectangle 28"/>
           <p:cNvSpPr/>
           <p:nvPr/>
         </p:nvSpPr>
         <p:spPr>
           <a:xfrm>
-            <a:off x="365760" y="3840480"/>
-            <a:ext cx="3703320" cy="91440"/>
+            <a:off x="6263640" y="3822191"/>
+            <a:ext cx="109728" cy="2304288"/>
           </a:xfrm>
           <a:prstGeom prst="rect">
             <a:avLst/>
           </a:prstGeom>
           <a:solidFill>
-            <a:srgbClr val="1A56DB"/>
+            <a:srgbClr val="0A2540"/>
           </a:solidFill>
           <a:ln>
             <a:noFill/>
@@ -11179,57 +11425,473 @@
       </p:sp>
       <p:sp>
         <p:nvSpPr>
-          <p:cNvPr id="24" name="TextBox 23"/>
-          <p:cNvSpPr txBox="1"/>
-          <p:nvPr/>
-        </p:nvSpPr>
-        <p:spPr>
-          <a:xfrm>
-            <a:off x="566928" y="4114800"/>
-            <a:ext cx="3291840" cy="384048"/>
-          </a:xfrm>
-          <a:prstGeom prst="rect">
-            <a:avLst/>
-          </a:prstGeom>
-          <a:noFill/>
-        </p:spPr>
-        <p:txBody>
-          <a:bodyPr wrap="square" anchor="t"/>
-          <a:lstStyle/>
-          <a:p>
-            <a:pPr algn="l">
-              <a:lnSpc>
-                <a:spcPct val="105000"/>
-              </a:lnSpc>
-              <a:spcBef>
-                <a:spcPts val="0"/>
-              </a:spcBef>
-              <a:spcAft>
-                <a:spcPts val="0"/>
-              </a:spcAft>
-            </a:pPr>
-            <a:r>
-              <a:rPr sz="2000" b="1" i="0">
+          <p:cNvPr id="30" name="TextBox 29"/>
+          <p:cNvSpPr txBox="1"/>
+          <p:nvPr/>
+        </p:nvSpPr>
+        <p:spPr>
+          <a:xfrm>
+            <a:off x="6611112" y="3968496"/>
+            <a:ext cx="5166360" cy="329184"/>
+          </a:xfrm>
+          <a:prstGeom prst="rect">
+            <a:avLst/>
+          </a:prstGeom>
+          <a:noFill/>
+        </p:spPr>
+        <p:txBody>
+          <a:bodyPr wrap="square" anchor="t"/>
+          <a:lstStyle/>
+          <a:p>
+            <a:pPr algn="l">
+              <a:lnSpc>
+                <a:spcPct val="105000"/>
+              </a:lnSpc>
+              <a:spcBef>
+                <a:spcPts val="0"/>
+              </a:spcBef>
+              <a:spcAft>
+                <a:spcPts val="0"/>
+              </a:spcAft>
+            </a:pPr>
+            <a:r>
+              <a:rPr sz="1400" b="1" i="0">
                 <a:solidFill>
                   <a:srgbClr val="0A2540"/>
                 </a:solidFill>
                 <a:latin typeface="Calibri"/>
               </a:rPr>
-              <a:t>Adithya</a:t>
-            </a:r>
-          </a:p>
-        </p:txBody>
-      </p:sp>
-      <p:sp>
-        <p:nvSpPr>
-          <p:cNvPr id="25" name="TextBox 24"/>
-          <p:cNvSpPr txBox="1"/>
-          <p:nvPr/>
-        </p:nvSpPr>
-        <p:spPr>
-          <a:xfrm>
-            <a:off x="566928" y="4553712"/>
-            <a:ext cx="3291840" cy="329184"/>
+              <a:t>INTEROPERABILITY</a:t>
+            </a:r>
+          </a:p>
+        </p:txBody>
+      </p:sp>
+      <p:sp>
+        <p:nvSpPr>
+          <p:cNvPr id="31" name="TextBox 30"/>
+          <p:cNvSpPr txBox="1"/>
+          <p:nvPr/>
+        </p:nvSpPr>
+        <p:spPr>
+          <a:xfrm>
+            <a:off x="6611112" y="4352544"/>
+            <a:ext cx="5166360" cy="384048"/>
+          </a:xfrm>
+          <a:prstGeom prst="rect">
+            <a:avLst/>
+          </a:prstGeom>
+          <a:noFill/>
+        </p:spPr>
+        <p:txBody>
+          <a:bodyPr wrap="square" anchor="t"/>
+          <a:lstStyle/>
+          <a:p>
+            <a:pPr algn="l">
+              <a:lnSpc>
+                <a:spcPct val="105000"/>
+              </a:lnSpc>
+              <a:spcBef>
+                <a:spcPts val="0"/>
+              </a:spcBef>
+              <a:spcAft>
+                <a:spcPts val="0"/>
+              </a:spcAft>
+            </a:pPr>
+            <a:r>
+              <a:rPr sz="1300" b="0" i="0">
+                <a:solidFill>
+                  <a:srgbClr val="334155"/>
+                </a:solidFill>
+                <a:latin typeface="Calibri"/>
+              </a:rPr>
+              <a:t>▸  HL7 FHIR R4 · SNOMED CT · LOINC</a:t>
+            </a:r>
+          </a:p>
+        </p:txBody>
+      </p:sp>
+      <p:sp>
+        <p:nvSpPr>
+          <p:cNvPr id="32" name="TextBox 31"/>
+          <p:cNvSpPr txBox="1"/>
+          <p:nvPr/>
+        </p:nvSpPr>
+        <p:spPr>
+          <a:xfrm>
+            <a:off x="6611112" y="4736592"/>
+            <a:ext cx="5166360" cy="384048"/>
+          </a:xfrm>
+          <a:prstGeom prst="rect">
+            <a:avLst/>
+          </a:prstGeom>
+          <a:noFill/>
+        </p:spPr>
+        <p:txBody>
+          <a:bodyPr wrap="square" anchor="t"/>
+          <a:lstStyle/>
+          <a:p>
+            <a:pPr algn="l">
+              <a:lnSpc>
+                <a:spcPct val="105000"/>
+              </a:lnSpc>
+              <a:spcBef>
+                <a:spcPts val="0"/>
+              </a:spcBef>
+              <a:spcAft>
+                <a:spcPts val="0"/>
+              </a:spcAft>
+            </a:pPr>
+            <a:r>
+              <a:rPr sz="1300" b="0" i="0">
+                <a:solidFill>
+                  <a:srgbClr val="334155"/>
+                </a:solidFill>
+                <a:latin typeface="Calibri"/>
+              </a:rPr>
+              <a:t>▸  Ayushman Bharat Digital Mission aligned</a:t>
+            </a:r>
+          </a:p>
+        </p:txBody>
+      </p:sp>
+      <p:sp>
+        <p:nvSpPr>
+          <p:cNvPr id="33" name="TextBox 32"/>
+          <p:cNvSpPr txBox="1"/>
+          <p:nvPr/>
+        </p:nvSpPr>
+        <p:spPr>
+          <a:xfrm>
+            <a:off x="6611112" y="5120640"/>
+            <a:ext cx="5166360" cy="384048"/>
+          </a:xfrm>
+          <a:prstGeom prst="rect">
+            <a:avLst/>
+          </a:prstGeom>
+          <a:noFill/>
+        </p:spPr>
+        <p:txBody>
+          <a:bodyPr wrap="square" anchor="t"/>
+          <a:lstStyle/>
+          <a:p>
+            <a:pPr algn="l">
+              <a:lnSpc>
+                <a:spcPct val="105000"/>
+              </a:lnSpc>
+              <a:spcBef>
+                <a:spcPts val="0"/>
+              </a:spcBef>
+              <a:spcAft>
+                <a:spcPts val="0"/>
+              </a:spcAft>
+            </a:pPr>
+            <a:r>
+              <a:rPr sz="1300" b="0" i="0">
+                <a:solidFill>
+                  <a:srgbClr val="334155"/>
+                </a:solidFill>
+                <a:latin typeface="Calibri"/>
+              </a:rPr>
+              <a:t>▸  Bilingual PDF screening dossier</a:t>
+            </a:r>
+          </a:p>
+        </p:txBody>
+      </p:sp>
+      <p:sp>
+        <p:nvSpPr>
+          <p:cNvPr id="34" name="TextBox 33"/>
+          <p:cNvSpPr txBox="1"/>
+          <p:nvPr/>
+        </p:nvSpPr>
+        <p:spPr>
+          <a:xfrm>
+            <a:off x="6611112" y="5504688"/>
+            <a:ext cx="5166360" cy="384048"/>
+          </a:xfrm>
+          <a:prstGeom prst="rect">
+            <a:avLst/>
+          </a:prstGeom>
+          <a:noFill/>
+        </p:spPr>
+        <p:txBody>
+          <a:bodyPr wrap="square" anchor="t"/>
+          <a:lstStyle/>
+          <a:p>
+            <a:pPr algn="l">
+              <a:lnSpc>
+                <a:spcPct val="105000"/>
+              </a:lnSpc>
+              <a:spcBef>
+                <a:spcPts val="0"/>
+              </a:spcBef>
+              <a:spcAft>
+                <a:spcPts val="0"/>
+              </a:spcAft>
+            </a:pPr>
+            <a:r>
+              <a:rPr sz="1300" b="0" i="0">
+                <a:solidFill>
+                  <a:srgbClr val="334155"/>
+                </a:solidFill>
+                <a:latin typeface="Calibri"/>
+              </a:rPr>
+              <a:t>▸  DPDP-aware: no unencrypted PHI on the open WAN</a:t>
+            </a:r>
+          </a:p>
+        </p:txBody>
+      </p:sp>
+      <p:sp>
+        <p:nvSpPr>
+          <p:cNvPr id="35" name="Rectangle 34"/>
+          <p:cNvSpPr/>
+          <p:nvPr/>
+        </p:nvSpPr>
+        <p:spPr>
+          <a:xfrm>
+            <a:off x="0" y="6656832"/>
+            <a:ext cx="12191695" cy="201168"/>
+          </a:xfrm>
+          <a:prstGeom prst="rect">
+            <a:avLst/>
+          </a:prstGeom>
+          <a:solidFill>
+            <a:srgbClr val="0A2540"/>
+          </a:solidFill>
+          <a:ln>
+            <a:noFill/>
+          </a:ln>
+          <a:effectLst/>
+        </p:spPr>
+        <p:style>
+          <a:lnRef idx="1">
+            <a:schemeClr val="accent1"/>
+          </a:lnRef>
+          <a:fillRef idx="3">
+            <a:schemeClr val="accent1"/>
+          </a:fillRef>
+          <a:effectRef idx="2">
+            <a:schemeClr val="accent1"/>
+          </a:effectRef>
+          <a:fontRef idx="minor">
+            <a:schemeClr val="lt1"/>
+          </a:fontRef>
+        </p:style>
+        <p:txBody>
+          <a:bodyPr rtlCol="0" anchor="ctr"/>
+          <a:lstStyle/>
+          <a:p>
+            <a:pPr algn="ctr"/>
+          </a:p>
+        </p:txBody>
+      </p:sp>
+      <p:sp>
+        <p:nvSpPr>
+          <p:cNvPr id="36" name="TextBox 35"/>
+          <p:cNvSpPr txBox="1"/>
+          <p:nvPr/>
+        </p:nvSpPr>
+        <p:spPr>
+          <a:xfrm>
+            <a:off x="411480" y="6656832"/>
+            <a:ext cx="8686800" cy="201168"/>
+          </a:xfrm>
+          <a:prstGeom prst="rect">
+            <a:avLst/>
+          </a:prstGeom>
+          <a:noFill/>
+        </p:spPr>
+        <p:txBody>
+          <a:bodyPr wrap="square" anchor="ctr"/>
+          <a:lstStyle/>
+          <a:p>
+            <a:pPr algn="l">
+              <a:lnSpc>
+                <a:spcPct val="105000"/>
+              </a:lnSpc>
+              <a:spcBef>
+                <a:spcPts val="0"/>
+              </a:spcBef>
+              <a:spcAft>
+                <a:spcPts val="0"/>
+              </a:spcAft>
+            </a:pPr>
+            <a:r>
+              <a:rPr sz="1000" b="0" i="0">
+                <a:solidFill>
+                  <a:srgbClr val="CBD5E1"/>
+                </a:solidFill>
+                <a:latin typeface="Calibri"/>
+              </a:rPr>
+              <a:t>Drishti-AI  ·  SIH26038  ·  MathWorks  ·  Software Prototype Track</a:t>
+            </a:r>
+          </a:p>
+        </p:txBody>
+      </p:sp>
+      <p:sp>
+        <p:nvSpPr>
+          <p:cNvPr id="37" name="TextBox 36"/>
+          <p:cNvSpPr txBox="1"/>
+          <p:nvPr/>
+        </p:nvSpPr>
+        <p:spPr>
+          <a:xfrm>
+            <a:off x="10424160" y="6656832"/>
+            <a:ext cx="1371600" cy="201168"/>
+          </a:xfrm>
+          <a:prstGeom prst="rect">
+            <a:avLst/>
+          </a:prstGeom>
+          <a:noFill/>
+        </p:spPr>
+        <p:txBody>
+          <a:bodyPr wrap="square" anchor="ctr"/>
+          <a:lstStyle/>
+          <a:p>
+            <a:pPr algn="r">
+              <a:lnSpc>
+                <a:spcPct val="105000"/>
+              </a:lnSpc>
+              <a:spcBef>
+                <a:spcPts val="0"/>
+              </a:spcBef>
+              <a:spcAft>
+                <a:spcPts val="0"/>
+              </a:spcAft>
+            </a:pPr>
+            <a:r>
+              <a:rPr sz="1000" b="1" i="0">
+                <a:solidFill>
+                  <a:srgbClr val="CCFBF1"/>
+                </a:solidFill>
+                <a:latin typeface="Calibri"/>
+              </a:rPr>
+              <a:t>13  /  15</a:t>
+            </a:r>
+          </a:p>
+        </p:txBody>
+      </p:sp>
+    </p:spTree>
+  </p:cSld>
+  <p:clrMapOvr>
+    <a:masterClrMapping/>
+  </p:clrMapOvr>
+</p:sld>
+</file>
+
+<file path=ppt/slides/slide14.xml><?xml version="1.0" encoding="utf-8"?>
+<p:sld xmlns:a="http://schemas.openxmlformats.org/drawingml/2006/main" xmlns:p="http://schemas.openxmlformats.org/presentationml/2006/main" xmlns:r="http://schemas.openxmlformats.org/officeDocument/2006/relationships">
+  <p:cSld>
+    <p:bg>
+      <p:bgPr>
+        <a:solidFill>
+          <a:srgbClr val="F8FAFC"/>
+        </a:solidFill>
+        <a:effectLst/>
+      </p:bgPr>
+    </p:bg>
+    <p:spTree>
+      <p:nvGrpSpPr>
+        <p:cNvPr id="1" name=""/>
+        <p:cNvGrpSpPr/>
+        <p:nvPr/>
+      </p:nvGrpSpPr>
+      <p:grpSpPr/>
+      <p:sp>
+        <p:nvSpPr>
+          <p:cNvPr id="2" name="Rectangle 1"/>
+          <p:cNvSpPr/>
+          <p:nvPr/>
+        </p:nvSpPr>
+        <p:spPr>
+          <a:xfrm>
+            <a:off x="0" y="0"/>
+            <a:ext cx="12191695" cy="1115568"/>
+          </a:xfrm>
+          <a:prstGeom prst="rect">
+            <a:avLst/>
+          </a:prstGeom>
+          <a:solidFill>
+            <a:srgbClr val="0A2540"/>
+          </a:solidFill>
+          <a:ln>
+            <a:noFill/>
+          </a:ln>
+          <a:effectLst/>
+        </p:spPr>
+        <p:style>
+          <a:lnRef idx="1">
+            <a:schemeClr val="accent1"/>
+          </a:lnRef>
+          <a:fillRef idx="3">
+            <a:schemeClr val="accent1"/>
+          </a:fillRef>
+          <a:effectRef idx="2">
+            <a:schemeClr val="accent1"/>
+          </a:effectRef>
+          <a:fontRef idx="minor">
+            <a:schemeClr val="lt1"/>
+          </a:fontRef>
+        </p:style>
+        <p:txBody>
+          <a:bodyPr rtlCol="0" anchor="ctr"/>
+          <a:lstStyle/>
+          <a:p>
+            <a:pPr algn="ctr"/>
+          </a:p>
+        </p:txBody>
+      </p:sp>
+      <p:sp>
+        <p:nvSpPr>
+          <p:cNvPr id="3" name="Rectangle 2"/>
+          <p:cNvSpPr/>
+          <p:nvPr/>
+        </p:nvSpPr>
+        <p:spPr>
+          <a:xfrm>
+            <a:off x="0" y="0"/>
+            <a:ext cx="128016" cy="1115568"/>
+          </a:xfrm>
+          <a:prstGeom prst="rect">
+            <a:avLst/>
+          </a:prstGeom>
+          <a:solidFill>
+            <a:srgbClr val="0D9488"/>
+          </a:solidFill>
+          <a:ln>
+            <a:noFill/>
+          </a:ln>
+          <a:effectLst/>
+        </p:spPr>
+        <p:style>
+          <a:lnRef idx="1">
+            <a:schemeClr val="accent1"/>
+          </a:lnRef>
+          <a:fillRef idx="3">
+            <a:schemeClr val="accent1"/>
+          </a:fillRef>
+          <a:effectRef idx="2">
+            <a:schemeClr val="accent1"/>
+          </a:effectRef>
+          <a:fontRef idx="minor">
+            <a:schemeClr val="lt1"/>
+          </a:fontRef>
+        </p:style>
+        <p:txBody>
+          <a:bodyPr rtlCol="0" anchor="ctr"/>
+          <a:lstStyle/>
+          <a:p>
+            <a:pPr algn="ctr"/>
+          </a:p>
+        </p:txBody>
+      </p:sp>
+      <p:sp>
+        <p:nvSpPr>
+          <p:cNvPr id="4" name="TextBox 3"/>
+          <p:cNvSpPr txBox="1"/>
+          <p:nvPr/>
+        </p:nvSpPr>
+        <p:spPr>
+          <a:xfrm>
+            <a:off x="411480" y="91440"/>
+            <a:ext cx="11338560" cy="256032"/>
           </a:xfrm>
           <a:prstGeom prst="rect">
             <a:avLst/>
@@ -11258,21 +11920,64 @@
                 </a:solidFill>
                 <a:latin typeface="Calibri"/>
               </a:rPr>
-              <a:t>SAFETY  ·  VERIFICATION</a:t>
-            </a:r>
-          </a:p>
-        </p:txBody>
-      </p:sp>
-      <p:sp>
-        <p:nvSpPr>
-          <p:cNvPr id="26" name="TextBox 25"/>
-          <p:cNvSpPr txBox="1"/>
-          <p:nvPr/>
-        </p:nvSpPr>
-        <p:spPr>
-          <a:xfrm>
-            <a:off x="566928" y="4983480"/>
-            <a:ext cx="3291840" cy="868680"/>
+              <a:t>13  —  WHO BUILDS WHAT</a:t>
+            </a:r>
+          </a:p>
+        </p:txBody>
+      </p:sp>
+      <p:sp>
+        <p:nvSpPr>
+          <p:cNvPr id="5" name="TextBox 4"/>
+          <p:cNvSpPr txBox="1"/>
+          <p:nvPr/>
+        </p:nvSpPr>
+        <p:spPr>
+          <a:xfrm>
+            <a:off x="411480" y="310896"/>
+            <a:ext cx="11338560" cy="420624"/>
+          </a:xfrm>
+          <a:prstGeom prst="rect">
+            <a:avLst/>
+          </a:prstGeom>
+          <a:noFill/>
+        </p:spPr>
+        <p:txBody>
+          <a:bodyPr wrap="square" anchor="t"/>
+          <a:lstStyle/>
+          <a:p>
+            <a:pPr algn="l">
+              <a:lnSpc>
+                <a:spcPct val="105000"/>
+              </a:lnSpc>
+              <a:spcBef>
+                <a:spcPts val="0"/>
+              </a:spcBef>
+              <a:spcAft>
+                <a:spcPts val="0"/>
+              </a:spcAft>
+            </a:pPr>
+            <a:r>
+              <a:rPr sz="2600" b="1" i="0">
+                <a:solidFill>
+                  <a:srgbClr val="FFFFFF"/>
+                </a:solidFill>
+                <a:latin typeface="Calibri"/>
+              </a:rPr>
+              <a:t>Six owners. Seven modules. One locked decision flow.</a:t>
+            </a:r>
+          </a:p>
+        </p:txBody>
+      </p:sp>
+      <p:sp>
+        <p:nvSpPr>
+          <p:cNvPr id="6" name="TextBox 5"/>
+          <p:cNvSpPr txBox="1"/>
+          <p:nvPr/>
+        </p:nvSpPr>
+        <p:spPr>
+          <a:xfrm>
+            <a:off x="411480" y="749808"/>
+            <a:ext cx="11338560" cy="292608"/>
           </a:xfrm>
           <a:prstGeom prst="rect">
             <a:avLst/>
@@ -11297,24 +12002,24 @@
             <a:r>
               <a:rPr sz="1300" b="0" i="0">
                 <a:solidFill>
-                  <a:srgbClr val="334155"/>
-                </a:solidFill>
-                <a:latin typeface="Calibri"/>
-              </a:rPr>
-              <a:t>150-sample benchmark, 0% forced-prediction proof, edge-case hardening.</a:t>
-            </a:r>
-          </a:p>
-        </p:txBody>
-      </p:sp>
-      <p:sp>
-        <p:nvSpPr>
-          <p:cNvPr id="27" name="Rounded Rectangle 26"/>
+                  <a:srgbClr val="CBD5E1"/>
+                </a:solidFill>
+                <a:latin typeface="Calibri"/>
+              </a:rPr>
+              <a:t>No orphan components — every module has a named lead and a deliverable.</a:t>
+            </a:r>
+          </a:p>
+        </p:txBody>
+      </p:sp>
+      <p:sp>
+        <p:nvSpPr>
+          <p:cNvPr id="7" name="Rounded Rectangle 6"/>
           <p:cNvSpPr/>
           <p:nvPr/>
         </p:nvSpPr>
         <p:spPr>
           <a:xfrm>
-            <a:off x="4251960" y="3840480"/>
+            <a:off x="365760" y="1371600"/>
             <a:ext cx="3703320" cy="2286000"/>
           </a:xfrm>
           <a:prstGeom prst="roundRect">
@@ -11356,13 +12061,13 @@
       </p:sp>
       <p:sp>
         <p:nvSpPr>
-          <p:cNvPr id="28" name="Rectangle 27"/>
+          <p:cNvPr id="8" name="Rectangle 7"/>
           <p:cNvSpPr/>
           <p:nvPr/>
         </p:nvSpPr>
         <p:spPr>
           <a:xfrm>
-            <a:off x="4251960" y="3840480"/>
+            <a:off x="365760" y="1371600"/>
             <a:ext cx="3703320" cy="91440"/>
           </a:xfrm>
           <a:prstGeom prst="rect">
@@ -11400,13 +12105,13 @@
       </p:sp>
       <p:sp>
         <p:nvSpPr>
-          <p:cNvPr id="29" name="TextBox 28"/>
-          <p:cNvSpPr txBox="1"/>
-          <p:nvPr/>
-        </p:nvSpPr>
-        <p:spPr>
-          <a:xfrm>
-            <a:off x="4453128" y="4114800"/>
+          <p:cNvPr id="9" name="TextBox 8"/>
+          <p:cNvSpPr txBox="1"/>
+          <p:nvPr/>
+        </p:nvSpPr>
+        <p:spPr>
+          <a:xfrm>
+            <a:off x="566928" y="1645920"/>
             <a:ext cx="3291840" cy="384048"/>
           </a:xfrm>
           <a:prstGeom prst="rect">
@@ -11436,20 +12141,20 @@
                 </a:solidFill>
                 <a:latin typeface="Calibri"/>
               </a:rPr>
-              <a:t>Sinduri</a:t>
-            </a:r>
-          </a:p>
-        </p:txBody>
-      </p:sp>
-      <p:sp>
-        <p:nvSpPr>
-          <p:cNvPr id="30" name="TextBox 29"/>
-          <p:cNvSpPr txBox="1"/>
-          <p:nvPr/>
-        </p:nvSpPr>
-        <p:spPr>
-          <a:xfrm>
-            <a:off x="4453128" y="4553712"/>
+              <a:t>Bezaleel</a:t>
+            </a:r>
+          </a:p>
+        </p:txBody>
+      </p:sp>
+      <p:sp>
+        <p:nvSpPr>
+          <p:cNvPr id="10" name="TextBox 9"/>
+          <p:cNvSpPr txBox="1"/>
+          <p:nvPr/>
+        </p:nvSpPr>
+        <p:spPr>
+          <a:xfrm>
+            <a:off x="566928" y="2084832"/>
             <a:ext cx="3291840" cy="329184"/>
           </a:xfrm>
           <a:prstGeom prst="rect">
@@ -11479,20 +12184,20 @@
                 </a:solidFill>
                 <a:latin typeface="Calibri"/>
               </a:rPr>
-              <a:t>UX  ·  ASHA FIELD</a:t>
-            </a:r>
-          </a:p>
-        </p:txBody>
-      </p:sp>
-      <p:sp>
-        <p:nvSpPr>
-          <p:cNvPr id="31" name="TextBox 30"/>
-          <p:cNvSpPr txBox="1"/>
-          <p:nvPr/>
-        </p:nvSpPr>
-        <p:spPr>
-          <a:xfrm>
-            <a:off x="4453128" y="4983480"/>
+              <a:t>TEAM LEAD  ·  FULL-STACK</a:t>
+            </a:r>
+          </a:p>
+        </p:txBody>
+      </p:sp>
+      <p:sp>
+        <p:nvSpPr>
+          <p:cNvPr id="11" name="TextBox 10"/>
+          <p:cNvSpPr txBox="1"/>
+          <p:nvPr/>
+        </p:nvSpPr>
+        <p:spPr>
+          <a:xfrm>
+            <a:off x="566928" y="2514600"/>
             <a:ext cx="3291840" cy="868680"/>
           </a:xfrm>
           <a:prstGeom prst="rect">
@@ -11522,20 +12227,20 @@
                 </a:solidFill>
                 <a:latin typeface="Calibri"/>
               </a:rPr>
-              <a:t>Mobile workflow, recapture HUD, Hindi audio prompts, Figma system.</a:t>
-            </a:r>
-          </a:p>
-        </p:txBody>
-      </p:sp>
-      <p:sp>
-        <p:nvSpPr>
-          <p:cNvPr id="32" name="Rounded Rectangle 31"/>
+              <a:t>Decision router, Streamlit, FastAPI, Docker, cross-platform zero-config.</a:t>
+            </a:r>
+          </a:p>
+        </p:txBody>
+      </p:sp>
+      <p:sp>
+        <p:nvSpPr>
+          <p:cNvPr id="12" name="Rounded Rectangle 11"/>
           <p:cNvSpPr/>
           <p:nvPr/>
         </p:nvSpPr>
         <p:spPr>
           <a:xfrm>
-            <a:off x="8138160" y="3840480"/>
+            <a:off x="4251960" y="1371600"/>
             <a:ext cx="3703320" cy="2286000"/>
           </a:xfrm>
           <a:prstGeom prst="roundRect">
@@ -11577,13 +12282,13 @@
       </p:sp>
       <p:sp>
         <p:nvSpPr>
-          <p:cNvPr id="33" name="Rectangle 32"/>
+          <p:cNvPr id="13" name="Rectangle 12"/>
           <p:cNvSpPr/>
           <p:nvPr/>
         </p:nvSpPr>
         <p:spPr>
           <a:xfrm>
-            <a:off x="8138160" y="3840480"/>
+            <a:off x="4251960" y="1371600"/>
             <a:ext cx="3703320" cy="91440"/>
           </a:xfrm>
           <a:prstGeom prst="rect">
@@ -11621,6 +12326,890 @@
       </p:sp>
       <p:sp>
         <p:nvSpPr>
+          <p:cNvPr id="14" name="TextBox 13"/>
+          <p:cNvSpPr txBox="1"/>
+          <p:nvPr/>
+        </p:nvSpPr>
+        <p:spPr>
+          <a:xfrm>
+            <a:off x="4453128" y="1645920"/>
+            <a:ext cx="3291840" cy="384048"/>
+          </a:xfrm>
+          <a:prstGeom prst="rect">
+            <a:avLst/>
+          </a:prstGeom>
+          <a:noFill/>
+        </p:spPr>
+        <p:txBody>
+          <a:bodyPr wrap="square" anchor="t"/>
+          <a:lstStyle/>
+          <a:p>
+            <a:pPr algn="l">
+              <a:lnSpc>
+                <a:spcPct val="105000"/>
+              </a:lnSpc>
+              <a:spcBef>
+                <a:spcPts val="0"/>
+              </a:spcBef>
+              <a:spcAft>
+                <a:spcPts val="0"/>
+              </a:spcAft>
+            </a:pPr>
+            <a:r>
+              <a:rPr sz="2000" b="1" i="0">
+                <a:solidFill>
+                  <a:srgbClr val="0A2540"/>
+                </a:solidFill>
+                <a:latin typeface="Calibri"/>
+              </a:rPr>
+              <a:t>Madhu</a:t>
+            </a:r>
+          </a:p>
+        </p:txBody>
+      </p:sp>
+      <p:sp>
+        <p:nvSpPr>
+          <p:cNvPr id="15" name="TextBox 14"/>
+          <p:cNvSpPr txBox="1"/>
+          <p:nvPr/>
+        </p:nvSpPr>
+        <p:spPr>
+          <a:xfrm>
+            <a:off x="4453128" y="2084832"/>
+            <a:ext cx="3291840" cy="329184"/>
+          </a:xfrm>
+          <a:prstGeom prst="rect">
+            <a:avLst/>
+          </a:prstGeom>
+          <a:noFill/>
+        </p:spPr>
+        <p:txBody>
+          <a:bodyPr wrap="square" anchor="t"/>
+          <a:lstStyle/>
+          <a:p>
+            <a:pPr algn="l">
+              <a:lnSpc>
+                <a:spcPct val="105000"/>
+              </a:lnSpc>
+              <a:spcBef>
+                <a:spcPts val="0"/>
+              </a:spcBef>
+              <a:spcAft>
+                <a:spcPts val="0"/>
+              </a:spcAft>
+            </a:pPr>
+            <a:r>
+              <a:rPr sz="1100" b="1" i="0">
+                <a:solidFill>
+                  <a:srgbClr val="0D9488"/>
+                </a:solidFill>
+                <a:latin typeface="Calibri"/>
+              </a:rPr>
+              <a:t>CLINICAL LEAD  ·  BIOMED</a:t>
+            </a:r>
+          </a:p>
+        </p:txBody>
+      </p:sp>
+      <p:sp>
+        <p:nvSpPr>
+          <p:cNvPr id="16" name="TextBox 15"/>
+          <p:cNvSpPr txBox="1"/>
+          <p:nvPr/>
+        </p:nvSpPr>
+        <p:spPr>
+          <a:xfrm>
+            <a:off x="4453128" y="2514600"/>
+            <a:ext cx="3291840" cy="868680"/>
+          </a:xfrm>
+          <a:prstGeom prst="rect">
+            <a:avLst/>
+          </a:prstGeom>
+          <a:noFill/>
+        </p:spPr>
+        <p:txBody>
+          <a:bodyPr wrap="square" anchor="t"/>
+          <a:lstStyle/>
+          <a:p>
+            <a:pPr algn="l">
+              <a:lnSpc>
+                <a:spcPct val="105000"/>
+              </a:lnSpc>
+              <a:spcBef>
+                <a:spcPts val="0"/>
+              </a:spcBef>
+              <a:spcAft>
+                <a:spcPts val="0"/>
+              </a:spcAft>
+            </a:pPr>
+            <a:r>
+              <a:rPr sz="1300" b="0" i="0">
+                <a:solidFill>
+                  <a:srgbClr val="334155"/>
+                </a:solidFill>
+                <a:latin typeface="Calibri"/>
+              </a:rPr>
+              <a:t>ICMR 2024 risk engine, OD/fovea CSME distance, clinical report validation.</a:t>
+            </a:r>
+          </a:p>
+        </p:txBody>
+      </p:sp>
+      <p:sp>
+        <p:nvSpPr>
+          <p:cNvPr id="17" name="Rounded Rectangle 16"/>
+          <p:cNvSpPr/>
+          <p:nvPr/>
+        </p:nvSpPr>
+        <p:spPr>
+          <a:xfrm>
+            <a:off x="8138160" y="1371600"/>
+            <a:ext cx="3703320" cy="2286000"/>
+          </a:xfrm>
+          <a:prstGeom prst="roundRect">
+            <a:avLst>
+              <a:gd name="adj" fmla="val 8000"/>
+            </a:avLst>
+          </a:prstGeom>
+          <a:solidFill>
+            <a:srgbClr val="FFFFFF"/>
+          </a:solidFill>
+          <a:ln w="12700">
+            <a:solidFill>
+              <a:srgbClr val="E2E8F0"/>
+            </a:solidFill>
+          </a:ln>
+          <a:effectLst/>
+        </p:spPr>
+        <p:style>
+          <a:lnRef idx="1">
+            <a:schemeClr val="accent1"/>
+          </a:lnRef>
+          <a:fillRef idx="3">
+            <a:schemeClr val="accent1"/>
+          </a:fillRef>
+          <a:effectRef idx="2">
+            <a:schemeClr val="accent1"/>
+          </a:effectRef>
+          <a:fontRef idx="minor">
+            <a:schemeClr val="lt1"/>
+          </a:fontRef>
+        </p:style>
+        <p:txBody>
+          <a:bodyPr rtlCol="0" anchor="ctr"/>
+          <a:lstStyle/>
+          <a:p>
+            <a:pPr algn="ctr"/>
+          </a:p>
+        </p:txBody>
+      </p:sp>
+      <p:sp>
+        <p:nvSpPr>
+          <p:cNvPr id="18" name="Rectangle 17"/>
+          <p:cNvSpPr/>
+          <p:nvPr/>
+        </p:nvSpPr>
+        <p:spPr>
+          <a:xfrm>
+            <a:off x="8138160" y="1371600"/>
+            <a:ext cx="3703320" cy="91440"/>
+          </a:xfrm>
+          <a:prstGeom prst="rect">
+            <a:avLst/>
+          </a:prstGeom>
+          <a:solidFill>
+            <a:srgbClr val="0D9488"/>
+          </a:solidFill>
+          <a:ln>
+            <a:noFill/>
+          </a:ln>
+          <a:effectLst/>
+        </p:spPr>
+        <p:style>
+          <a:lnRef idx="1">
+            <a:schemeClr val="accent1"/>
+          </a:lnRef>
+          <a:fillRef idx="3">
+            <a:schemeClr val="accent1"/>
+          </a:fillRef>
+          <a:effectRef idx="2">
+            <a:schemeClr val="accent1"/>
+          </a:effectRef>
+          <a:fontRef idx="minor">
+            <a:schemeClr val="lt1"/>
+          </a:fontRef>
+        </p:style>
+        <p:txBody>
+          <a:bodyPr rtlCol="0" anchor="ctr"/>
+          <a:lstStyle/>
+          <a:p>
+            <a:pPr algn="ctr"/>
+          </a:p>
+        </p:txBody>
+      </p:sp>
+      <p:sp>
+        <p:nvSpPr>
+          <p:cNvPr id="19" name="TextBox 18"/>
+          <p:cNvSpPr txBox="1"/>
+          <p:nvPr/>
+        </p:nvSpPr>
+        <p:spPr>
+          <a:xfrm>
+            <a:off x="8339328" y="1645920"/>
+            <a:ext cx="3291840" cy="384048"/>
+          </a:xfrm>
+          <a:prstGeom prst="rect">
+            <a:avLst/>
+          </a:prstGeom>
+          <a:noFill/>
+        </p:spPr>
+        <p:txBody>
+          <a:bodyPr wrap="square" anchor="t"/>
+          <a:lstStyle/>
+          <a:p>
+            <a:pPr algn="l">
+              <a:lnSpc>
+                <a:spcPct val="105000"/>
+              </a:lnSpc>
+              <a:spcBef>
+                <a:spcPts val="0"/>
+              </a:spcBef>
+              <a:spcAft>
+                <a:spcPts val="0"/>
+              </a:spcAft>
+            </a:pPr>
+            <a:r>
+              <a:rPr sz="2000" b="1" i="0">
+                <a:solidFill>
+                  <a:srgbClr val="0A2540"/>
+                </a:solidFill>
+                <a:latin typeface="Calibri"/>
+              </a:rPr>
+              <a:t>Akshay</a:t>
+            </a:r>
+          </a:p>
+        </p:txBody>
+      </p:sp>
+      <p:sp>
+        <p:nvSpPr>
+          <p:cNvPr id="20" name="TextBox 19"/>
+          <p:cNvSpPr txBox="1"/>
+          <p:nvPr/>
+        </p:nvSpPr>
+        <p:spPr>
+          <a:xfrm>
+            <a:off x="8339328" y="2084832"/>
+            <a:ext cx="3291840" cy="329184"/>
+          </a:xfrm>
+          <a:prstGeom prst="rect">
+            <a:avLst/>
+          </a:prstGeom>
+          <a:noFill/>
+        </p:spPr>
+        <p:txBody>
+          <a:bodyPr wrap="square" anchor="t"/>
+          <a:lstStyle/>
+          <a:p>
+            <a:pPr algn="l">
+              <a:lnSpc>
+                <a:spcPct val="105000"/>
+              </a:lnSpc>
+              <a:spcBef>
+                <a:spcPts val="0"/>
+              </a:spcBef>
+              <a:spcAft>
+                <a:spcPts val="0"/>
+              </a:spcAft>
+            </a:pPr>
+            <a:r>
+              <a:rPr sz="1100" b="1" i="0">
+                <a:solidFill>
+                  <a:srgbClr val="0D9488"/>
+                </a:solidFill>
+                <a:latin typeface="Calibri"/>
+              </a:rPr>
+              <a:t>DEEP LEARNING  ·  OPS</a:t>
+            </a:r>
+          </a:p>
+        </p:txBody>
+      </p:sp>
+      <p:sp>
+        <p:nvSpPr>
+          <p:cNvPr id="21" name="TextBox 20"/>
+          <p:cNvSpPr txBox="1"/>
+          <p:nvPr/>
+        </p:nvSpPr>
+        <p:spPr>
+          <a:xfrm>
+            <a:off x="8339328" y="2514600"/>
+            <a:ext cx="3291840" cy="868680"/>
+          </a:xfrm>
+          <a:prstGeom prst="rect">
+            <a:avLst/>
+          </a:prstGeom>
+          <a:noFill/>
+        </p:spPr>
+        <p:txBody>
+          <a:bodyPr wrap="square" anchor="t"/>
+          <a:lstStyle/>
+          <a:p>
+            <a:pPr algn="l">
+              <a:lnSpc>
+                <a:spcPct val="105000"/>
+              </a:lnSpc>
+              <a:spcBef>
+                <a:spcPts val="0"/>
+              </a:spcBef>
+              <a:spcAft>
+                <a:spcPts val="0"/>
+              </a:spcAft>
+            </a:pPr>
+            <a:r>
+              <a:rPr sz="1300" b="0" i="0">
+                <a:solidFill>
+                  <a:srgbClr val="334155"/>
+                </a:solidFill>
+                <a:latin typeface="Calibri"/>
+              </a:rPr>
+              <a:t>EfficientNetB0, Grad-CAM++, MATLAB/Simulink 100k-patient queueing model.</a:t>
+            </a:r>
+          </a:p>
+        </p:txBody>
+      </p:sp>
+      <p:sp>
+        <p:nvSpPr>
+          <p:cNvPr id="22" name="Rounded Rectangle 21"/>
+          <p:cNvSpPr/>
+          <p:nvPr/>
+        </p:nvSpPr>
+        <p:spPr>
+          <a:xfrm>
+            <a:off x="365760" y="3840480"/>
+            <a:ext cx="3703320" cy="2286000"/>
+          </a:xfrm>
+          <a:prstGeom prst="roundRect">
+            <a:avLst>
+              <a:gd name="adj" fmla="val 8000"/>
+            </a:avLst>
+          </a:prstGeom>
+          <a:solidFill>
+            <a:srgbClr val="FFFFFF"/>
+          </a:solidFill>
+          <a:ln w="12700">
+            <a:solidFill>
+              <a:srgbClr val="E2E8F0"/>
+            </a:solidFill>
+          </a:ln>
+          <a:effectLst/>
+        </p:spPr>
+        <p:style>
+          <a:lnRef idx="1">
+            <a:schemeClr val="accent1"/>
+          </a:lnRef>
+          <a:fillRef idx="3">
+            <a:schemeClr val="accent1"/>
+          </a:fillRef>
+          <a:effectRef idx="2">
+            <a:schemeClr val="accent1"/>
+          </a:effectRef>
+          <a:fontRef idx="minor">
+            <a:schemeClr val="lt1"/>
+          </a:fontRef>
+        </p:style>
+        <p:txBody>
+          <a:bodyPr rtlCol="0" anchor="ctr"/>
+          <a:lstStyle/>
+          <a:p>
+            <a:pPr algn="ctr"/>
+          </a:p>
+        </p:txBody>
+      </p:sp>
+      <p:sp>
+        <p:nvSpPr>
+          <p:cNvPr id="23" name="Rectangle 22"/>
+          <p:cNvSpPr/>
+          <p:nvPr/>
+        </p:nvSpPr>
+        <p:spPr>
+          <a:xfrm>
+            <a:off x="365760" y="3840480"/>
+            <a:ext cx="3703320" cy="91440"/>
+          </a:xfrm>
+          <a:prstGeom prst="rect">
+            <a:avLst/>
+          </a:prstGeom>
+          <a:solidFill>
+            <a:srgbClr val="1A56DB"/>
+          </a:solidFill>
+          <a:ln>
+            <a:noFill/>
+          </a:ln>
+          <a:effectLst/>
+        </p:spPr>
+        <p:style>
+          <a:lnRef idx="1">
+            <a:schemeClr val="accent1"/>
+          </a:lnRef>
+          <a:fillRef idx="3">
+            <a:schemeClr val="accent1"/>
+          </a:fillRef>
+          <a:effectRef idx="2">
+            <a:schemeClr val="accent1"/>
+          </a:effectRef>
+          <a:fontRef idx="minor">
+            <a:schemeClr val="lt1"/>
+          </a:fontRef>
+        </p:style>
+        <p:txBody>
+          <a:bodyPr rtlCol="0" anchor="ctr"/>
+          <a:lstStyle/>
+          <a:p>
+            <a:pPr algn="ctr"/>
+          </a:p>
+        </p:txBody>
+      </p:sp>
+      <p:sp>
+        <p:nvSpPr>
+          <p:cNvPr id="24" name="TextBox 23"/>
+          <p:cNvSpPr txBox="1"/>
+          <p:nvPr/>
+        </p:nvSpPr>
+        <p:spPr>
+          <a:xfrm>
+            <a:off x="566928" y="4114800"/>
+            <a:ext cx="3291840" cy="384048"/>
+          </a:xfrm>
+          <a:prstGeom prst="rect">
+            <a:avLst/>
+          </a:prstGeom>
+          <a:noFill/>
+        </p:spPr>
+        <p:txBody>
+          <a:bodyPr wrap="square" anchor="t"/>
+          <a:lstStyle/>
+          <a:p>
+            <a:pPr algn="l">
+              <a:lnSpc>
+                <a:spcPct val="105000"/>
+              </a:lnSpc>
+              <a:spcBef>
+                <a:spcPts val="0"/>
+              </a:spcBef>
+              <a:spcAft>
+                <a:spcPts val="0"/>
+              </a:spcAft>
+            </a:pPr>
+            <a:r>
+              <a:rPr sz="2000" b="1" i="0">
+                <a:solidFill>
+                  <a:srgbClr val="0A2540"/>
+                </a:solidFill>
+                <a:latin typeface="Calibri"/>
+              </a:rPr>
+              <a:t>Adithya</a:t>
+            </a:r>
+          </a:p>
+        </p:txBody>
+      </p:sp>
+      <p:sp>
+        <p:nvSpPr>
+          <p:cNvPr id="25" name="TextBox 24"/>
+          <p:cNvSpPr txBox="1"/>
+          <p:nvPr/>
+        </p:nvSpPr>
+        <p:spPr>
+          <a:xfrm>
+            <a:off x="566928" y="4553712"/>
+            <a:ext cx="3291840" cy="329184"/>
+          </a:xfrm>
+          <a:prstGeom prst="rect">
+            <a:avLst/>
+          </a:prstGeom>
+          <a:noFill/>
+        </p:spPr>
+        <p:txBody>
+          <a:bodyPr wrap="square" anchor="t"/>
+          <a:lstStyle/>
+          <a:p>
+            <a:pPr algn="l">
+              <a:lnSpc>
+                <a:spcPct val="105000"/>
+              </a:lnSpc>
+              <a:spcBef>
+                <a:spcPts val="0"/>
+              </a:spcBef>
+              <a:spcAft>
+                <a:spcPts val="0"/>
+              </a:spcAft>
+            </a:pPr>
+            <a:r>
+              <a:rPr sz="1100" b="1" i="0">
+                <a:solidFill>
+                  <a:srgbClr val="0D9488"/>
+                </a:solidFill>
+                <a:latin typeface="Calibri"/>
+              </a:rPr>
+              <a:t>SAFETY  ·  VERIFICATION</a:t>
+            </a:r>
+          </a:p>
+        </p:txBody>
+      </p:sp>
+      <p:sp>
+        <p:nvSpPr>
+          <p:cNvPr id="26" name="TextBox 25"/>
+          <p:cNvSpPr txBox="1"/>
+          <p:nvPr/>
+        </p:nvSpPr>
+        <p:spPr>
+          <a:xfrm>
+            <a:off x="566928" y="4983480"/>
+            <a:ext cx="3291840" cy="868680"/>
+          </a:xfrm>
+          <a:prstGeom prst="rect">
+            <a:avLst/>
+          </a:prstGeom>
+          <a:noFill/>
+        </p:spPr>
+        <p:txBody>
+          <a:bodyPr wrap="square" anchor="t"/>
+          <a:lstStyle/>
+          <a:p>
+            <a:pPr algn="l">
+              <a:lnSpc>
+                <a:spcPct val="105000"/>
+              </a:lnSpc>
+              <a:spcBef>
+                <a:spcPts val="0"/>
+              </a:spcBef>
+              <a:spcAft>
+                <a:spcPts val="0"/>
+              </a:spcAft>
+            </a:pPr>
+            <a:r>
+              <a:rPr sz="1300" b="0" i="0">
+                <a:solidFill>
+                  <a:srgbClr val="334155"/>
+                </a:solidFill>
+                <a:latin typeface="Calibri"/>
+              </a:rPr>
+              <a:t>150-sample benchmark, 0% forced-prediction proof, edge-case hardening.</a:t>
+            </a:r>
+          </a:p>
+        </p:txBody>
+      </p:sp>
+      <p:sp>
+        <p:nvSpPr>
+          <p:cNvPr id="27" name="Rounded Rectangle 26"/>
+          <p:cNvSpPr/>
+          <p:nvPr/>
+        </p:nvSpPr>
+        <p:spPr>
+          <a:xfrm>
+            <a:off x="4251960" y="3840480"/>
+            <a:ext cx="3703320" cy="2286000"/>
+          </a:xfrm>
+          <a:prstGeom prst="roundRect">
+            <a:avLst>
+              <a:gd name="adj" fmla="val 8000"/>
+            </a:avLst>
+          </a:prstGeom>
+          <a:solidFill>
+            <a:srgbClr val="FFFFFF"/>
+          </a:solidFill>
+          <a:ln w="12700">
+            <a:solidFill>
+              <a:srgbClr val="E2E8F0"/>
+            </a:solidFill>
+          </a:ln>
+          <a:effectLst/>
+        </p:spPr>
+        <p:style>
+          <a:lnRef idx="1">
+            <a:schemeClr val="accent1"/>
+          </a:lnRef>
+          <a:fillRef idx="3">
+            <a:schemeClr val="accent1"/>
+          </a:fillRef>
+          <a:effectRef idx="2">
+            <a:schemeClr val="accent1"/>
+          </a:effectRef>
+          <a:fontRef idx="minor">
+            <a:schemeClr val="lt1"/>
+          </a:fontRef>
+        </p:style>
+        <p:txBody>
+          <a:bodyPr rtlCol="0" anchor="ctr"/>
+          <a:lstStyle/>
+          <a:p>
+            <a:pPr algn="ctr"/>
+          </a:p>
+        </p:txBody>
+      </p:sp>
+      <p:sp>
+        <p:nvSpPr>
+          <p:cNvPr id="28" name="Rectangle 27"/>
+          <p:cNvSpPr/>
+          <p:nvPr/>
+        </p:nvSpPr>
+        <p:spPr>
+          <a:xfrm>
+            <a:off x="4251960" y="3840480"/>
+            <a:ext cx="3703320" cy="91440"/>
+          </a:xfrm>
+          <a:prstGeom prst="rect">
+            <a:avLst/>
+          </a:prstGeom>
+          <a:solidFill>
+            <a:srgbClr val="0D9488"/>
+          </a:solidFill>
+          <a:ln>
+            <a:noFill/>
+          </a:ln>
+          <a:effectLst/>
+        </p:spPr>
+        <p:style>
+          <a:lnRef idx="1">
+            <a:schemeClr val="accent1"/>
+          </a:lnRef>
+          <a:fillRef idx="3">
+            <a:schemeClr val="accent1"/>
+          </a:fillRef>
+          <a:effectRef idx="2">
+            <a:schemeClr val="accent1"/>
+          </a:effectRef>
+          <a:fontRef idx="minor">
+            <a:schemeClr val="lt1"/>
+          </a:fontRef>
+        </p:style>
+        <p:txBody>
+          <a:bodyPr rtlCol="0" anchor="ctr"/>
+          <a:lstStyle/>
+          <a:p>
+            <a:pPr algn="ctr"/>
+          </a:p>
+        </p:txBody>
+      </p:sp>
+      <p:sp>
+        <p:nvSpPr>
+          <p:cNvPr id="29" name="TextBox 28"/>
+          <p:cNvSpPr txBox="1"/>
+          <p:nvPr/>
+        </p:nvSpPr>
+        <p:spPr>
+          <a:xfrm>
+            <a:off x="4453128" y="4114800"/>
+            <a:ext cx="3291840" cy="384048"/>
+          </a:xfrm>
+          <a:prstGeom prst="rect">
+            <a:avLst/>
+          </a:prstGeom>
+          <a:noFill/>
+        </p:spPr>
+        <p:txBody>
+          <a:bodyPr wrap="square" anchor="t"/>
+          <a:lstStyle/>
+          <a:p>
+            <a:pPr algn="l">
+              <a:lnSpc>
+                <a:spcPct val="105000"/>
+              </a:lnSpc>
+              <a:spcBef>
+                <a:spcPts val="0"/>
+              </a:spcBef>
+              <a:spcAft>
+                <a:spcPts val="0"/>
+              </a:spcAft>
+            </a:pPr>
+            <a:r>
+              <a:rPr sz="2000" b="1" i="0">
+                <a:solidFill>
+                  <a:srgbClr val="0A2540"/>
+                </a:solidFill>
+                <a:latin typeface="Calibri"/>
+              </a:rPr>
+              <a:t>Sinduri</a:t>
+            </a:r>
+          </a:p>
+        </p:txBody>
+      </p:sp>
+      <p:sp>
+        <p:nvSpPr>
+          <p:cNvPr id="30" name="TextBox 29"/>
+          <p:cNvSpPr txBox="1"/>
+          <p:nvPr/>
+        </p:nvSpPr>
+        <p:spPr>
+          <a:xfrm>
+            <a:off x="4453128" y="4553712"/>
+            <a:ext cx="3291840" cy="329184"/>
+          </a:xfrm>
+          <a:prstGeom prst="rect">
+            <a:avLst/>
+          </a:prstGeom>
+          <a:noFill/>
+        </p:spPr>
+        <p:txBody>
+          <a:bodyPr wrap="square" anchor="t"/>
+          <a:lstStyle/>
+          <a:p>
+            <a:pPr algn="l">
+              <a:lnSpc>
+                <a:spcPct val="105000"/>
+              </a:lnSpc>
+              <a:spcBef>
+                <a:spcPts val="0"/>
+              </a:spcBef>
+              <a:spcAft>
+                <a:spcPts val="0"/>
+              </a:spcAft>
+            </a:pPr>
+            <a:r>
+              <a:rPr sz="1100" b="1" i="0">
+                <a:solidFill>
+                  <a:srgbClr val="0D9488"/>
+                </a:solidFill>
+                <a:latin typeface="Calibri"/>
+              </a:rPr>
+              <a:t>UX  ·  ASHA FIELD</a:t>
+            </a:r>
+          </a:p>
+        </p:txBody>
+      </p:sp>
+      <p:sp>
+        <p:nvSpPr>
+          <p:cNvPr id="31" name="TextBox 30"/>
+          <p:cNvSpPr txBox="1"/>
+          <p:nvPr/>
+        </p:nvSpPr>
+        <p:spPr>
+          <a:xfrm>
+            <a:off x="4453128" y="4983480"/>
+            <a:ext cx="3291840" cy="868680"/>
+          </a:xfrm>
+          <a:prstGeom prst="rect">
+            <a:avLst/>
+          </a:prstGeom>
+          <a:noFill/>
+        </p:spPr>
+        <p:txBody>
+          <a:bodyPr wrap="square" anchor="t"/>
+          <a:lstStyle/>
+          <a:p>
+            <a:pPr algn="l">
+              <a:lnSpc>
+                <a:spcPct val="105000"/>
+              </a:lnSpc>
+              <a:spcBef>
+                <a:spcPts val="0"/>
+              </a:spcBef>
+              <a:spcAft>
+                <a:spcPts val="0"/>
+              </a:spcAft>
+            </a:pPr>
+            <a:r>
+              <a:rPr sz="1300" b="0" i="0">
+                <a:solidFill>
+                  <a:srgbClr val="334155"/>
+                </a:solidFill>
+                <a:latin typeface="Calibri"/>
+              </a:rPr>
+              <a:t>Mobile workflow, recapture HUD, Hindi audio prompts, Figma system.</a:t>
+            </a:r>
+          </a:p>
+        </p:txBody>
+      </p:sp>
+      <p:sp>
+        <p:nvSpPr>
+          <p:cNvPr id="32" name="Rounded Rectangle 31"/>
+          <p:cNvSpPr/>
+          <p:nvPr/>
+        </p:nvSpPr>
+        <p:spPr>
+          <a:xfrm>
+            <a:off x="8138160" y="3840480"/>
+            <a:ext cx="3703320" cy="2286000"/>
+          </a:xfrm>
+          <a:prstGeom prst="roundRect">
+            <a:avLst>
+              <a:gd name="adj" fmla="val 8000"/>
+            </a:avLst>
+          </a:prstGeom>
+          <a:solidFill>
+            <a:srgbClr val="FFFFFF"/>
+          </a:solidFill>
+          <a:ln w="12700">
+            <a:solidFill>
+              <a:srgbClr val="E2E8F0"/>
+            </a:solidFill>
+          </a:ln>
+          <a:effectLst/>
+        </p:spPr>
+        <p:style>
+          <a:lnRef idx="1">
+            <a:schemeClr val="accent1"/>
+          </a:lnRef>
+          <a:fillRef idx="3">
+            <a:schemeClr val="accent1"/>
+          </a:fillRef>
+          <a:effectRef idx="2">
+            <a:schemeClr val="accent1"/>
+          </a:effectRef>
+          <a:fontRef idx="minor">
+            <a:schemeClr val="lt1"/>
+          </a:fontRef>
+        </p:style>
+        <p:txBody>
+          <a:bodyPr rtlCol="0" anchor="ctr"/>
+          <a:lstStyle/>
+          <a:p>
+            <a:pPr algn="ctr"/>
+          </a:p>
+        </p:txBody>
+      </p:sp>
+      <p:sp>
+        <p:nvSpPr>
+          <p:cNvPr id="33" name="Rectangle 32"/>
+          <p:cNvSpPr/>
+          <p:nvPr/>
+        </p:nvSpPr>
+        <p:spPr>
+          <a:xfrm>
+            <a:off x="8138160" y="3840480"/>
+            <a:ext cx="3703320" cy="91440"/>
+          </a:xfrm>
+          <a:prstGeom prst="rect">
+            <a:avLst/>
+          </a:prstGeom>
+          <a:solidFill>
+            <a:srgbClr val="1A56DB"/>
+          </a:solidFill>
+          <a:ln>
+            <a:noFill/>
+          </a:ln>
+          <a:effectLst/>
+        </p:spPr>
+        <p:style>
+          <a:lnRef idx="1">
+            <a:schemeClr val="accent1"/>
+          </a:lnRef>
+          <a:fillRef idx="3">
+            <a:schemeClr val="accent1"/>
+          </a:fillRef>
+          <a:effectRef idx="2">
+            <a:schemeClr val="accent1"/>
+          </a:effectRef>
+          <a:fontRef idx="minor">
+            <a:schemeClr val="lt1"/>
+          </a:fontRef>
+        </p:style>
+        <p:txBody>
+          <a:bodyPr rtlCol="0" anchor="ctr"/>
+          <a:lstStyle/>
+          <a:p>
+            <a:pPr algn="ctr"/>
+          </a:p>
+        </p:txBody>
+      </p:sp>
+      <p:sp>
+        <p:nvSpPr>
           <p:cNvPr id="34" name="TextBox 33"/>
           <p:cNvSpPr txBox="1"/>
           <p:nvPr/>
@@ -11873,7 +13462,7 @@
                 </a:solidFill>
                 <a:latin typeface="Calibri"/>
               </a:rPr>
-              <a:t>13  /  14</a:t>
+              <a:t>14  /  15</a:t>
             </a:r>
           </a:p>
         </p:txBody>
@@ -11886,7 +13475,7 @@
 </p:sld>
 </file>
 
-<file path=ppt/slides/slide14.xml><?xml version="1.0" encoding="utf-8"?>
+<file path=ppt/slides/slide15.xml><?xml version="1.0" encoding="utf-8"?>
 <p:sld xmlns:a="http://schemas.openxmlformats.org/drawingml/2006/main" xmlns:p="http://schemas.openxmlformats.org/presentationml/2006/main" xmlns:r="http://schemas.openxmlformats.org/officeDocument/2006/relationships">
   <p:cSld>
     <p:bg>
@@ -11986,7 +13575,7 @@
                 </a:solidFill>
                 <a:latin typeface="Calibri"/>
               </a:rPr>
-              <a:t>13  —  WHAT WE WANT JUDGES TO REMEMBER</a:t>
+              <a:t>14  —  WHAT WE WANT JUDGES TO REMEMBER</a:t>
             </a:r>
           </a:p>
         </p:txBody>
@@ -12709,7 +14298,7 @@
                 </a:solidFill>
                 <a:latin typeface="Calibri"/>
               </a:rPr>
-              <a:t>Live demo  ·  docker compose up  ·  localhost:8501     ·     Q &amp; A</a:t>
+              <a:t>Live app  ·  docker compose up  ·  localhost:8000/app     ·     Q &amp; A</a:t>
             </a:r>
           </a:p>
         </p:txBody>
@@ -14186,7 +15775,7 @@
                 </a:solidFill>
                 <a:latin typeface="Calibri"/>
               </a:rPr>
-              <a:t>02  /  14</a:t>
+              <a:t>02  /  15</a:t>
             </a:r>
           </a:p>
         </p:txBody>
@@ -15443,7 +17032,7 @@
                 </a:solidFill>
                 <a:latin typeface="Calibri"/>
               </a:rPr>
-              <a:t>03  /  14</a:t>
+              <a:t>03  /  15</a:t>
             </a:r>
           </a:p>
         </p:txBody>
@@ -16627,7 +18216,7 @@
                 </a:solidFill>
                 <a:latin typeface="Calibri"/>
               </a:rPr>
-              <a:t>04  /  14</a:t>
+              <a:t>04  /  15</a:t>
             </a:r>
           </a:p>
         </p:txBody>
@@ -18056,7 +19645,7 @@
                 </a:solidFill>
                 <a:latin typeface="Calibri"/>
               </a:rPr>
-              <a:t>05  /  14</a:t>
+              <a:t>05  /  15</a:t>
             </a:r>
           </a:p>
         </p:txBody>
@@ -19359,7 +20948,7 @@
                 </a:solidFill>
                 <a:latin typeface="Calibri"/>
               </a:rPr>
-              <a:t>06  /  14</a:t>
+              <a:t>06  /  15</a:t>
             </a:r>
           </a:p>
         </p:txBody>
@@ -20811,7 +22400,7 @@
                 </a:solidFill>
                 <a:latin typeface="Calibri"/>
               </a:rPr>
-              <a:t>07  /  14</a:t>
+              <a:t>07  /  15</a:t>
             </a:r>
           </a:p>
         </p:txBody>
@@ -22904,7 +24493,7 @@
                 </a:solidFill>
                 <a:latin typeface="Calibri"/>
               </a:rPr>
-              <a:t>08  /  14</a:t>
+              <a:t>08  /  15</a:t>
             </a:r>
           </a:p>
         </p:txBody>
@@ -24382,7 +25971,7 @@
                 </a:solidFill>
                 <a:latin typeface="Calibri"/>
               </a:rPr>
-              <a:t>09  /  14</a:t>
+              <a:t>09  /  15</a:t>
             </a:r>
           </a:p>
         </p:txBody>
